--- a/CONTESTED_pitch.pptx
+++ b/CONTESTED_pitch.pptx
@@ -6,11 +6,10 @@
   </p:sldMasterIdLst>
   <p:sldIdLst>
     <p:sldId id="256" r:id="rId7"/>
-    <p:sldId id="257" r:id="rId8"/>
-    <p:sldId id="258" r:id="rId9"/>
-    <p:sldId id="259" r:id="rId10"/>
-    <p:sldId id="260" r:id="rId11"/>
-    <p:sldId id="261" r:id="rId12"/>
+    <p:sldId id="257" r:id="rId9"/>
+    <p:sldId id="258" r:id="rId10"/>
+    <p:sldId id="259" r:id="rId11"/>
+    <p:sldId id="260" r:id="rId12"/>
   </p:sldIdLst>
   <p:sldSz cx="12191695" cy="6858000" type="screen4x3"/>
   <p:notesSz cx="6858000" cy="9144000"/>
@@ -110,6 +109,989 @@
     </a:lvl9pPr>
   </p:defaultTextStyle>
 </p:presentation>
+</file>
+
+<file path=ppt/notesMasters/notesMaster1.xml><?xml version="1.0" encoding="utf-8"?>
+<p:notesMaster xmlns:a="http://schemas.openxmlformats.org/drawingml/2006/main" xmlns:p="http://schemas.openxmlformats.org/presentationml/2006/main" xmlns:r="http://schemas.openxmlformats.org/officeDocument/2006/relationships">
+  <p:cSld>
+    <p:bg>
+      <p:bgRef idx="1001">
+        <a:schemeClr val="bg1"/>
+      </p:bgRef>
+    </p:bg>
+    <p:spTree>
+      <p:nvGrpSpPr>
+        <p:cNvPr id="1" name=""/>
+        <p:cNvGrpSpPr/>
+        <p:nvPr/>
+      </p:nvGrpSpPr>
+      <p:grpSpPr>
+        <a:xfrm>
+          <a:off x="0" y="0"/>
+          <a:ext cx="0" cy="0"/>
+          <a:chOff x="0" y="0"/>
+          <a:chExt cx="0" cy="0"/>
+        </a:xfrm>
+      </p:grpSpPr>
+      <p:sp>
+        <p:nvSpPr>
+          <p:cNvPr id="2" name="Header Placeholder 1"/>
+          <p:cNvSpPr>
+            <a:spLocks noGrp="1"/>
+          </p:cNvSpPr>
+          <p:nvPr>
+            <p:ph type="hdr" sz="quarter"/>
+          </p:nvPr>
+        </p:nvSpPr>
+        <p:spPr>
+          <a:xfrm>
+            <a:off x="0" y="0"/>
+            <a:ext cx="2971800" cy="457200"/>
+          </a:xfrm>
+          <a:prstGeom prst="rect">
+            <a:avLst/>
+          </a:prstGeom>
+        </p:spPr>
+        <p:txBody>
+          <a:bodyPr vert="horz" lIns="91440" tIns="45720" rIns="91440" bIns="45720" rtlCol="0"/>
+          <a:lstStyle>
+            <a:lvl1pPr algn="l">
+              <a:defRPr sz="1200"/>
+            </a:lvl1pPr>
+          </a:lstStyle>
+          <a:p>
+            <a:endParaRPr lang="en-US"/>
+          </a:p>
+        </p:txBody>
+      </p:sp>
+      <p:sp>
+        <p:nvSpPr>
+          <p:cNvPr id="3" name="Date Placeholder 2"/>
+          <p:cNvSpPr>
+            <a:spLocks noGrp="1"/>
+          </p:cNvSpPr>
+          <p:nvPr>
+            <p:ph type="dt" idx="1"/>
+          </p:nvPr>
+        </p:nvSpPr>
+        <p:spPr>
+          <a:xfrm>
+            <a:off x="3884613" y="0"/>
+            <a:ext cx="2971800" cy="457200"/>
+          </a:xfrm>
+          <a:prstGeom prst="rect">
+            <a:avLst/>
+          </a:prstGeom>
+        </p:spPr>
+        <p:txBody>
+          <a:bodyPr vert="horz" lIns="91440" tIns="45720" rIns="91440" bIns="45720" rtlCol="0"/>
+          <a:lstStyle>
+            <a:lvl1pPr algn="r">
+              <a:defRPr sz="1200"/>
+            </a:lvl1pPr>
+          </a:lstStyle>
+          <a:p>
+            <a:fld id="{0F89C1C7-3DCD-1040-A9CF-14679D8B5DDD}" type="datetimeFigureOut">
+              <a:rPr lang="en-US" smtClean="0"/>
+              <a:t>10/17/16</a:t>
+            </a:fld>
+            <a:endParaRPr lang="en-US"/>
+          </a:p>
+        </p:txBody>
+      </p:sp>
+      <p:sp>
+        <p:nvSpPr>
+          <p:cNvPr id="4" name="Slide Image Placeholder 3"/>
+          <p:cNvSpPr>
+            <a:spLocks noGrp="1" noRot="1" noChangeAspect="1"/>
+          </p:cNvSpPr>
+          <p:nvPr>
+            <p:ph type="sldImg" idx="2"/>
+          </p:nvPr>
+        </p:nvSpPr>
+        <p:spPr>
+          <a:xfrm>
+            <a:off x="1143000" y="685800"/>
+            <a:ext cx="4572000" cy="3429000"/>
+          </a:xfrm>
+          <a:prstGeom prst="rect">
+            <a:avLst/>
+          </a:prstGeom>
+          <a:noFill/>
+          <a:ln w="12700">
+            <a:solidFill>
+              <a:prstClr val="black"/>
+            </a:solidFill>
+          </a:ln>
+        </p:spPr>
+        <p:txBody>
+          <a:bodyPr vert="horz" lIns="91440" tIns="45720" rIns="91440" bIns="45720" rtlCol="0" anchor="ctr"/>
+          <a:lstStyle/>
+          <a:p>
+            <a:endParaRPr lang="en-US"/>
+          </a:p>
+        </p:txBody>
+      </p:sp>
+      <p:sp>
+        <p:nvSpPr>
+          <p:cNvPr id="5" name="Notes Placeholder 4"/>
+          <p:cNvSpPr>
+            <a:spLocks noGrp="1"/>
+          </p:cNvSpPr>
+          <p:nvPr>
+            <p:ph type="body" sz="quarter" idx="3"/>
+          </p:nvPr>
+        </p:nvSpPr>
+        <p:spPr>
+          <a:xfrm>
+            <a:off x="685800" y="4343400"/>
+            <a:ext cx="5486400" cy="4114800"/>
+          </a:xfrm>
+          <a:prstGeom prst="rect">
+            <a:avLst/>
+          </a:prstGeom>
+        </p:spPr>
+        <p:txBody>
+          <a:bodyPr vert="horz" lIns="91440" tIns="45720" rIns="91440" bIns="45720" rtlCol="0"/>
+          <a:lstStyle/>
+          <a:p>
+            <a:pPr lvl="0"/>
+            <a:r>
+              <a:rPr lang="en-US" smtClean="0"/>
+              <a:t>Click to edit Master text styles</a:t>
+            </a:r>
+          </a:p>
+          <a:p>
+            <a:pPr lvl="1"/>
+            <a:r>
+              <a:rPr lang="en-US" smtClean="0"/>
+              <a:t>Second level</a:t>
+            </a:r>
+          </a:p>
+          <a:p>
+            <a:pPr lvl="2"/>
+            <a:r>
+              <a:rPr lang="en-US" smtClean="0"/>
+              <a:t>Third level</a:t>
+            </a:r>
+          </a:p>
+          <a:p>
+            <a:pPr lvl="3"/>
+            <a:r>
+              <a:rPr lang="en-US" smtClean="0"/>
+              <a:t>Fourth level</a:t>
+            </a:r>
+          </a:p>
+          <a:p>
+            <a:pPr lvl="4"/>
+            <a:r>
+              <a:rPr lang="en-US" smtClean="0"/>
+              <a:t>Fifth level</a:t>
+            </a:r>
+            <a:endParaRPr lang="en-US"/>
+          </a:p>
+        </p:txBody>
+      </p:sp>
+      <p:sp>
+        <p:nvSpPr>
+          <p:cNvPr id="6" name="Footer Placeholder 5"/>
+          <p:cNvSpPr>
+            <a:spLocks noGrp="1"/>
+          </p:cNvSpPr>
+          <p:nvPr>
+            <p:ph type="ftr" sz="quarter" idx="4"/>
+          </p:nvPr>
+        </p:nvSpPr>
+        <p:spPr>
+          <a:xfrm>
+            <a:off x="0" y="8685213"/>
+            <a:ext cx="2971800" cy="457200"/>
+          </a:xfrm>
+          <a:prstGeom prst="rect">
+            <a:avLst/>
+          </a:prstGeom>
+        </p:spPr>
+        <p:txBody>
+          <a:bodyPr vert="horz" lIns="91440" tIns="45720" rIns="91440" bIns="45720" rtlCol="0" anchor="b"/>
+          <a:lstStyle>
+            <a:lvl1pPr algn="l">
+              <a:defRPr sz="1200"/>
+            </a:lvl1pPr>
+          </a:lstStyle>
+          <a:p>
+            <a:endParaRPr lang="en-US"/>
+          </a:p>
+        </p:txBody>
+      </p:sp>
+      <p:sp>
+        <p:nvSpPr>
+          <p:cNvPr id="7" name="Slide Number Placeholder 6"/>
+          <p:cNvSpPr>
+            <a:spLocks noGrp="1"/>
+          </p:cNvSpPr>
+          <p:nvPr>
+            <p:ph type="sldNum" sz="quarter" idx="5"/>
+          </p:nvPr>
+        </p:nvSpPr>
+        <p:spPr>
+          <a:xfrm>
+            <a:off x="3884613" y="8685213"/>
+            <a:ext cx="2971800" cy="457200"/>
+          </a:xfrm>
+          <a:prstGeom prst="rect">
+            <a:avLst/>
+          </a:prstGeom>
+        </p:spPr>
+        <p:txBody>
+          <a:bodyPr vert="horz" lIns="91440" tIns="45720" rIns="91440" bIns="45720" rtlCol="0" anchor="b"/>
+          <a:lstStyle>
+            <a:lvl1pPr algn="r">
+              <a:defRPr sz="1200"/>
+            </a:lvl1pPr>
+          </a:lstStyle>
+          <a:p>
+            <a:fld id="{BB5E49A5-4136-284D-997B-48E1D791AD67}" type="slidenum">
+              <a:rPr lang="en-US" smtClean="0"/>
+              <a:t>‹#›</a:t>
+            </a:fld>
+            <a:endParaRPr lang="en-US"/>
+          </a:p>
+        </p:txBody>
+      </p:sp>
+    </p:spTree>
+    <p:extLst>
+      <p:ext uri="{BB962C8B-B14F-4D97-AF65-F5344CB8AC3E}">
+        <p14:creationId xmlns:p14="http://schemas.microsoft.com/office/powerpoint/2010/main" val="2623252185"/>
+      </p:ext>
+    </p:extLst>
+  </p:cSld>
+  <p:clrMap bg1="lt1" tx1="dk1" bg2="lt2" tx2="dk2" accent1="accent1" accent2="accent2" accent3="accent3" accent4="accent4" accent5="accent5" accent6="accent6" hlink="hlink" folHlink="folHlink"/>
+  <p:notesStyle>
+    <a:lvl1pPr marL="0" algn="l" defTabSz="457200" rtl="0" eaLnBrk="1" latinLnBrk="0" hangingPunct="1">
+      <a:defRPr sz="1200" kern="1200">
+        <a:solidFill>
+          <a:schemeClr val="tx1"/>
+        </a:solidFill>
+        <a:latin typeface="+mn-lt"/>
+        <a:ea typeface="+mn-ea"/>
+        <a:cs typeface="+mn-cs"/>
+      </a:defRPr>
+    </a:lvl1pPr>
+    <a:lvl2pPr marL="457200" algn="l" defTabSz="457200" rtl="0" eaLnBrk="1" latinLnBrk="0" hangingPunct="1">
+      <a:defRPr sz="1200" kern="1200">
+        <a:solidFill>
+          <a:schemeClr val="tx1"/>
+        </a:solidFill>
+        <a:latin typeface="+mn-lt"/>
+        <a:ea typeface="+mn-ea"/>
+        <a:cs typeface="+mn-cs"/>
+      </a:defRPr>
+    </a:lvl2pPr>
+    <a:lvl3pPr marL="914400" algn="l" defTabSz="457200" rtl="0" eaLnBrk="1" latinLnBrk="0" hangingPunct="1">
+      <a:defRPr sz="1200" kern="1200">
+        <a:solidFill>
+          <a:schemeClr val="tx1"/>
+        </a:solidFill>
+        <a:latin typeface="+mn-lt"/>
+        <a:ea typeface="+mn-ea"/>
+        <a:cs typeface="+mn-cs"/>
+      </a:defRPr>
+    </a:lvl3pPr>
+    <a:lvl4pPr marL="1371600" algn="l" defTabSz="457200" rtl="0" eaLnBrk="1" latinLnBrk="0" hangingPunct="1">
+      <a:defRPr sz="1200" kern="1200">
+        <a:solidFill>
+          <a:schemeClr val="tx1"/>
+        </a:solidFill>
+        <a:latin typeface="+mn-lt"/>
+        <a:ea typeface="+mn-ea"/>
+        <a:cs typeface="+mn-cs"/>
+      </a:defRPr>
+    </a:lvl4pPr>
+    <a:lvl5pPr marL="1828800" algn="l" defTabSz="457200" rtl="0" eaLnBrk="1" latinLnBrk="0" hangingPunct="1">
+      <a:defRPr sz="1200" kern="1200">
+        <a:solidFill>
+          <a:schemeClr val="tx1"/>
+        </a:solidFill>
+        <a:latin typeface="+mn-lt"/>
+        <a:ea typeface="+mn-ea"/>
+        <a:cs typeface="+mn-cs"/>
+      </a:defRPr>
+    </a:lvl5pPr>
+    <a:lvl6pPr marL="2286000" algn="l" defTabSz="457200" rtl="0" eaLnBrk="1" latinLnBrk="0" hangingPunct="1">
+      <a:defRPr sz="1200" kern="1200">
+        <a:solidFill>
+          <a:schemeClr val="tx1"/>
+        </a:solidFill>
+        <a:latin typeface="+mn-lt"/>
+        <a:ea typeface="+mn-ea"/>
+        <a:cs typeface="+mn-cs"/>
+      </a:defRPr>
+    </a:lvl6pPr>
+    <a:lvl7pPr marL="2743200" algn="l" defTabSz="457200" rtl="0" eaLnBrk="1" latinLnBrk="0" hangingPunct="1">
+      <a:defRPr sz="1200" kern="1200">
+        <a:solidFill>
+          <a:schemeClr val="tx1"/>
+        </a:solidFill>
+        <a:latin typeface="+mn-lt"/>
+        <a:ea typeface="+mn-ea"/>
+        <a:cs typeface="+mn-cs"/>
+      </a:defRPr>
+    </a:lvl7pPr>
+    <a:lvl8pPr marL="3200400" algn="l" defTabSz="457200" rtl="0" eaLnBrk="1" latinLnBrk="0" hangingPunct="1">
+      <a:defRPr sz="1200" kern="1200">
+        <a:solidFill>
+          <a:schemeClr val="tx1"/>
+        </a:solidFill>
+        <a:latin typeface="+mn-lt"/>
+        <a:ea typeface="+mn-ea"/>
+        <a:cs typeface="+mn-cs"/>
+      </a:defRPr>
+    </a:lvl8pPr>
+    <a:lvl9pPr marL="3657600" algn="l" defTabSz="457200" rtl="0" eaLnBrk="1" latinLnBrk="0" hangingPunct="1">
+      <a:defRPr sz="1200" kern="1200">
+        <a:solidFill>
+          <a:schemeClr val="tx1"/>
+        </a:solidFill>
+        <a:latin typeface="+mn-lt"/>
+        <a:ea typeface="+mn-ea"/>
+        <a:cs typeface="+mn-cs"/>
+      </a:defRPr>
+    </a:lvl9pPr>
+  </p:notesStyle>
+</p:notesMaster>
+</file>
+
+<file path=ppt/notesSlides/notesSlide1.xml><?xml version="1.0" encoding="utf-8"?>
+<p:notes xmlns:a="http://schemas.openxmlformats.org/drawingml/2006/main" xmlns:p="http://schemas.openxmlformats.org/presentationml/2006/main" xmlns:r="http://schemas.openxmlformats.org/officeDocument/2006/relationships">
+  <p:cSld>
+    <p:spTree>
+      <p:nvGrpSpPr>
+        <p:cNvPr id="1" name=""/>
+        <p:cNvGrpSpPr/>
+        <p:nvPr/>
+      </p:nvGrpSpPr>
+      <p:grpSpPr>
+        <a:xfrm>
+          <a:off x="0" y="0"/>
+          <a:ext cx="0" cy="0"/>
+          <a:chOff x="0" y="0"/>
+          <a:chExt cx="0" cy="0"/>
+        </a:xfrm>
+      </p:grpSpPr>
+      <p:sp>
+        <p:nvSpPr>
+          <p:cNvPr id="2" name="Slide Image Placeholder 1"/>
+          <p:cNvSpPr>
+            <a:spLocks noGrp="1"/>
+          </p:cNvSpPr>
+          <p:nvPr>
+            <p:ph type="sldImg" idx="2"/>
+          </p:nvPr>
+        </p:nvSpPr>
+        <p:spPr/>
+      </p:sp>
+      <p:sp>
+        <p:nvSpPr>
+          <p:cNvPr id="3" name="Notes Placeholder 2"/>
+          <p:cNvSpPr>
+            <a:spLocks noGrp="1"/>
+          </p:cNvSpPr>
+          <p:nvPr>
+            <p:ph type="body" idx="3" sz="quarter"/>
+          </p:nvPr>
+        </p:nvSpPr>
+        <p:spPr/>
+        <p:txBody>
+          <a:bodyPr/>
+          <a:lstStyle/>
+          <a:p>
+            <a:r>
+              <a:t>HOOK  |  32 sec  |  78 spoken words  |  slow, this is the whole pitch</a:t>
+            </a:r>
+          </a:p>
+          <a:p/>
+          <a:p>
+            <a:r>
+              <a:t>SAY:</a:t>
+            </a:r>
+          </a:p>
+          <a:p>
+            <a:r>
+              <a:t>"Marathon Petroleum. Fifteenth of eighteen energy companies on how clean it is</a:t>
+            </a:r>
+          </a:p>
+          <a:p>
+            <a:r>
+              <a:t>today. Sixth of eighteen on how fast it is improving.</a:t>
+            </a:r>
+          </a:p>
+          <a:p/>
+          <a:p>
+            <a:r>
+              <a:t>Same company. Same data. Same year.</a:t>
+            </a:r>
+          </a:p>
+          <a:p/>
+          <a:p>
+            <a:r>
+              <a:t>[PAUSE ONE BEAT]</a:t>
+            </a:r>
+          </a:p>
+          <a:p/>
+          <a:p>
+            <a:r>
+              <a:t>Neither number is wrong. They answer two different questions, and the rating</a:t>
+            </a:r>
+          </a:p>
+          <a:p>
+            <a:r>
+              <a:t>industry publishes one of them without telling you which.</a:t>
+            </a:r>
+          </a:p>
+          <a:p/>
+          <a:p>
+            <a:r>
+              <a:t>That is what an ESG score is. One answer to a question nobody wrote down.</a:t>
+            </a:r>
+          </a:p>
+          <a:p>
+            <a:r>
+              <a:t>We publish the question, the answer, and how much the answer depends on the</a:t>
+            </a:r>
+          </a:p>
+          <a:p>
+            <a:r>
+              <a:t>question."</a:t>
+            </a:r>
+          </a:p>
+          <a:p/>
+          <a:p>
+            <a:r>
+              <a:t>DO NOT say methodology, specification or grid on this slide.</a:t>
+            </a:r>
+          </a:p>
+        </p:txBody>
+      </p:sp>
+      <p:sp>
+        <p:nvSpPr>
+          <p:cNvPr id="4" name="Slide Number Placeholder 3"/>
+          <p:cNvSpPr>
+            <a:spLocks noGrp="1"/>
+          </p:cNvSpPr>
+          <p:nvPr>
+            <p:ph type="sldNum" idx="5" sz="quarter"/>
+          </p:nvPr>
+        </p:nvSpPr>
+        <p:spPr/>
+      </p:sp>
+    </p:spTree>
+  </p:cSld>
+  <p:clrMapOvr>
+    <a:masterClrMapping/>
+  </p:clrMapOvr>
+</p:notes>
+</file>
+
+<file path=ppt/notesSlides/notesSlide2.xml><?xml version="1.0" encoding="utf-8"?>
+<p:notes xmlns:a="http://schemas.openxmlformats.org/drawingml/2006/main" xmlns:p="http://schemas.openxmlformats.org/presentationml/2006/main" xmlns:r="http://schemas.openxmlformats.org/officeDocument/2006/relationships">
+  <p:cSld>
+    <p:spTree>
+      <p:nvGrpSpPr>
+        <p:cNvPr id="1" name=""/>
+        <p:cNvGrpSpPr/>
+        <p:nvPr/>
+      </p:nvGrpSpPr>
+      <p:grpSpPr>
+        <a:xfrm>
+          <a:off x="0" y="0"/>
+          <a:ext cx="0" cy="0"/>
+          <a:chOff x="0" y="0"/>
+          <a:chExt cx="0" cy="0"/>
+        </a:xfrm>
+      </p:grpSpPr>
+      <p:sp>
+        <p:nvSpPr>
+          <p:cNvPr id="2" name="Slide Image Placeholder 1"/>
+          <p:cNvSpPr>
+            <a:spLocks noGrp="1"/>
+          </p:cNvSpPr>
+          <p:nvPr>
+            <p:ph type="sldImg" idx="2"/>
+          </p:nvPr>
+        </p:nvSpPr>
+        <p:spPr/>
+      </p:sp>
+      <p:sp>
+        <p:nvSpPr>
+          <p:cNvPr id="3" name="Notes Placeholder 2"/>
+          <p:cNvSpPr>
+            <a:spLocks noGrp="1"/>
+          </p:cNvSpPr>
+          <p:nvPr>
+            <p:ph type="body" idx="3" sz="quarter"/>
+          </p:nvPr>
+        </p:nvSpPr>
+        <p:spPr/>
+        <p:txBody>
+          <a:bodyPr/>
+          <a:lstStyle/>
+          <a:p>
+            <a:r>
+              <a:t>DEFINITION + STUDY + COMPANIES  |  40 sec  |  103 spoken words</a:t>
+            </a:r>
+          </a:p>
+          <a:p/>
+          <a:p>
+            <a:r>
+              <a:t>SAY:</a:t>
+            </a:r>
+          </a:p>
+          <a:p>
+            <a:r>
+              <a:t>"Our definition: less irreversible harm per unit of output than the peers making</a:t>
+            </a:r>
+          </a:p>
+          <a:p>
+            <a:r>
+              <a:t>the same product, and a balance sheet that survives the transition. Financial</a:t>
+            </a:r>
+          </a:p>
+          <a:p>
+            <a:r>
+              <a:t>resilience is in there because a company in distress cuts abatement first.</a:t>
+            </a:r>
+          </a:p>
+          <a:p/>
+          <a:p>
+            <a:r>
+              <a:t>Why do raters disagree? Berg and co-authors decomposed it. Fifty-six percent is</a:t>
+            </a:r>
+          </a:p>
+          <a:p>
+            <a:r>
+              <a:t>measurement. Thirty-eight percent is scope. Only six percent is the pillar</a:t>
+            </a:r>
+          </a:p>
+          <a:p>
+            <a:r>
+              <a:t>weighting, which is the only part anyone lets you touch.</a:t>
+            </a:r>
+          </a:p>
+          <a:p/>
+          <a:p>
+            <a:r>
+              <a:t>So we attack the ninety-four percent. Nine choices where MSCI and Bloomberg</a:t>
+            </a:r>
+          </a:p>
+          <a:p>
+            <a:r>
+              <a:t>publish different methods, every combination.</a:t>
+            </a:r>
+          </a:p>
+          <a:p/>
+          <a:p>
+            <a:r>
+              <a:t>Right: all eighteen companies, both questions. Bar length is how far the answer</a:t>
+            </a:r>
+          </a:p>
+          <a:p>
+            <a:r>
+              <a:t>moves on method alone."</a:t>
+            </a:r>
+          </a:p>
+          <a:p/>
+          <a:p>
+            <a:r>
+              <a:t>LAND 56 / 38 / 6 CLEARLY. Paraphrase the definition, do not read it.</a:t>
+            </a:r>
+          </a:p>
+        </p:txBody>
+      </p:sp>
+      <p:sp>
+        <p:nvSpPr>
+          <p:cNvPr id="4" name="Slide Number Placeholder 3"/>
+          <p:cNvSpPr>
+            <a:spLocks noGrp="1"/>
+          </p:cNvSpPr>
+          <p:nvPr>
+            <p:ph type="sldNum" idx="5" sz="quarter"/>
+          </p:nvPr>
+        </p:nvSpPr>
+        <p:spPr/>
+      </p:sp>
+    </p:spTree>
+  </p:cSld>
+  <p:clrMapOvr>
+    <a:masterClrMapping/>
+  </p:clrMapOvr>
+</p:notes>
+</file>
+
+<file path=ppt/notesSlides/notesSlide3.xml><?xml version="1.0" encoding="utf-8"?>
+<p:notes xmlns:a="http://schemas.openxmlformats.org/drawingml/2006/main" xmlns:p="http://schemas.openxmlformats.org/presentationml/2006/main" xmlns:r="http://schemas.openxmlformats.org/officeDocument/2006/relationships">
+  <p:cSld>
+    <p:spTree>
+      <p:nvGrpSpPr>
+        <p:cNvPr id="1" name=""/>
+        <p:cNvGrpSpPr/>
+        <p:nvPr/>
+      </p:nvGrpSpPr>
+      <p:grpSpPr>
+        <a:xfrm>
+          <a:off x="0" y="0"/>
+          <a:ext cx="0" cy="0"/>
+          <a:chOff x="0" y="0"/>
+          <a:chExt cx="0" cy="0"/>
+        </a:xfrm>
+      </p:grpSpPr>
+      <p:sp>
+        <p:nvSpPr>
+          <p:cNvPr id="2" name="Slide Image Placeholder 1"/>
+          <p:cNvSpPr>
+            <a:spLocks noGrp="1"/>
+          </p:cNvSpPr>
+          <p:nvPr>
+            <p:ph type="sldImg" idx="2"/>
+          </p:nvPr>
+        </p:nvSpPr>
+        <p:spPr/>
+      </p:sp>
+      <p:sp>
+        <p:nvSpPr>
+          <p:cNvPr id="3" name="Notes Placeholder 2"/>
+          <p:cNvSpPr>
+            <a:spLocks noGrp="1"/>
+          </p:cNvSpPr>
+          <p:nvPr>
+            <p:ph type="body" idx="3" sz="quarter"/>
+          </p:nvPr>
+        </p:nvSpPr>
+        <p:spPr/>
+        <p:txBody>
+          <a:bodyPr/>
+          <a:lstStyle/>
+          <a:p>
+            <a:r>
+              <a:t>BRIDGE  |  12 sec  |  32 spoken words  |  fast</a:t>
+            </a:r>
+          </a:p>
+          <a:p/>
+          <a:p>
+            <a:r>
+              <a:t>SAY:</a:t>
+            </a:r>
+          </a:p>
+          <a:p>
+            <a:r>
+              <a:t>"Why energy? Hardest sector to score. Only three of thirty-seven environmental</a:t>
+            </a:r>
+          </a:p>
+          <a:p>
+            <a:r>
+              <a:t>fields are reported by all eighteen companies. Scope Three is absent entirely,</a:t>
+            </a:r>
+          </a:p>
+          <a:p>
+            <a:r>
+              <a:t>and we say so. Let me show you."</a:t>
+            </a:r>
+          </a:p>
+          <a:p/>
+          <a:p>
+            <a:r>
+              <a:t>THEN SWITCH TO THE BROWSER IMMEDIATELY.</a:t>
+            </a:r>
+          </a:p>
+        </p:txBody>
+      </p:sp>
+      <p:sp>
+        <p:nvSpPr>
+          <p:cNvPr id="4" name="Slide Number Placeholder 3"/>
+          <p:cNvSpPr>
+            <a:spLocks noGrp="1"/>
+          </p:cNvSpPr>
+          <p:nvPr>
+            <p:ph type="sldNum" idx="5" sz="quarter"/>
+          </p:nvPr>
+        </p:nvSpPr>
+        <p:spPr/>
+      </p:sp>
+    </p:spTree>
+  </p:cSld>
+  <p:clrMapOvr>
+    <a:masterClrMapping/>
+  </p:clrMapOvr>
+</p:notes>
+</file>
+
+<file path=ppt/notesSlides/notesSlide4.xml><?xml version="1.0" encoding="utf-8"?>
+<p:notes xmlns:a="http://schemas.openxmlformats.org/drawingml/2006/main" xmlns:p="http://schemas.openxmlformats.org/presentationml/2006/main" xmlns:r="http://schemas.openxmlformats.org/officeDocument/2006/relationships">
+  <p:cSld>
+    <p:spTree>
+      <p:nvGrpSpPr>
+        <p:cNvPr id="1" name=""/>
+        <p:cNvGrpSpPr/>
+        <p:nvPr/>
+      </p:nvGrpSpPr>
+      <p:grpSpPr>
+        <a:xfrm>
+          <a:off x="0" y="0"/>
+          <a:ext cx="0" cy="0"/>
+          <a:chOff x="0" y="0"/>
+          <a:chExt cx="0" cy="0"/>
+        </a:xfrm>
+      </p:grpSpPr>
+      <p:sp>
+        <p:nvSpPr>
+          <p:cNvPr id="2" name="Slide Image Placeholder 1"/>
+          <p:cNvSpPr>
+            <a:spLocks noGrp="1"/>
+          </p:cNvSpPr>
+          <p:nvPr>
+            <p:ph type="sldImg" idx="2"/>
+          </p:nvPr>
+        </p:nvSpPr>
+        <p:spPr/>
+      </p:sp>
+      <p:sp>
+        <p:nvSpPr>
+          <p:cNvPr id="3" name="Notes Placeholder 2"/>
+          <p:cNvSpPr>
+            <a:spLocks noGrp="1"/>
+          </p:cNvSpPr>
+          <p:nvPr>
+            <p:ph type="body" idx="3" sz="quarter"/>
+          </p:nvPr>
+        </p:nvSpPr>
+        <p:spPr/>
+        <p:txBody>
+          <a:bodyPr/>
+          <a:lstStyle/>
+          <a:p>
+            <a:r>
+              <a:t>DEMO  |  68 sec  |  170 spoken words  |  DO EXACTLY THIS</a:t>
+            </a:r>
+          </a:p>
+          <a:p/>
+          <a:p>
+            <a:r>
+              <a:t>1 (8s) "Eighteen companies ranked. Consensus here. This bar is how much of that</a:t>
+            </a:r>
+          </a:p>
+          <a:p>
+            <a:r>
+              <a:t>   rank is a choice."</a:t>
+            </a:r>
+          </a:p>
+          <a:p/>
+          <a:p>
+            <a:r>
+              <a:t>2 (15s) DRAG THE ENVIRONMENT SLIDER.</a:t>
+            </a:r>
+          </a:p>
+          <a:p>
+            <a:r>
+              <a:t>   "This is what every provider gives you. Pillar weights. It moves the median</a:t>
+            </a:r>
+          </a:p>
+          <a:p>
+            <a:r>
+              <a:t>   company three places. That is the six percent."</a:t>
+            </a:r>
+          </a:p>
+          <a:p/>
+          <a:p>
+            <a:r>
+              <a:t>3 (20s) PIN Direction to LEVEL, then Evidence bar to STRICT.</a:t>
+            </a:r>
+          </a:p>
+          <a:p>
+            <a:r>
+              <a:t>   "Here is what nobody gives you. This is the question I am asking. And this is</a:t>
+            </a:r>
+          </a:p>
+          <a:p>
+            <a:r>
+              <a:t>   how demanding I am about evidence."</a:t>
+            </a:r>
+          </a:p>
+          <a:p/>
+          <a:p>
+            <a:r>
+              <a:t>4 (15s) POINT AT THE SETTLED COUNTER.</a:t>
+            </a:r>
+          </a:p>
+          <a:p>
+            <a:r>
+              <a:t>   "Thirty-three of a hundred and fifty-three comparisons survive every method.</a:t>
+            </a:r>
+          </a:p>
+          <a:p>
+            <a:r>
+              <a:t>   Raise the bar, fifty-six. A league table asserts all hundred and fifty-three."</a:t>
+            </a:r>
+          </a:p>
+          <a:p/>
+          <a:p>
+            <a:r>
+              <a:t>5 (10s) HOVER A POINT ON THE CURVE.</a:t>
+            </a:r>
+          </a:p>
+          <a:p>
+            <a:r>
+              <a:t>   "Every point tells you which nine choices produced it. No black box."</a:t>
+            </a:r>
+          </a:p>
+          <a:p/>
+          <a:p>
+            <a:r>
+              <a:t>IF IT BREAKS: skip to the last slide, say "numbers are in the paper, tool is in</a:t>
+            </a:r>
+          </a:p>
+          <a:p>
+            <a:r>
+              <a:t>the repo". Never debug on stage.</a:t>
+            </a:r>
+          </a:p>
+        </p:txBody>
+      </p:sp>
+      <p:sp>
+        <p:nvSpPr>
+          <p:cNvPr id="4" name="Slide Number Placeholder 3"/>
+          <p:cNvSpPr>
+            <a:spLocks noGrp="1"/>
+          </p:cNvSpPr>
+          <p:nvPr>
+            <p:ph type="sldNum" idx="5" sz="quarter"/>
+          </p:nvPr>
+        </p:nvSpPr>
+        <p:spPr/>
+      </p:sp>
+    </p:spTree>
+  </p:cSld>
+  <p:clrMapOvr>
+    <a:masterClrMapping/>
+  </p:clrMapOvr>
+</p:notes>
+</file>
+
+<file path=ppt/notesSlides/notesSlide5.xml><?xml version="1.0" encoding="utf-8"?>
+<p:notes xmlns:a="http://schemas.openxmlformats.org/drawingml/2006/main" xmlns:p="http://schemas.openxmlformats.org/presentationml/2006/main" xmlns:r="http://schemas.openxmlformats.org/officeDocument/2006/relationships">
+  <p:cSld>
+    <p:spTree>
+      <p:nvGrpSpPr>
+        <p:cNvPr id="1" name=""/>
+        <p:cNvGrpSpPr/>
+        <p:nvPr/>
+      </p:nvGrpSpPr>
+      <p:grpSpPr>
+        <a:xfrm>
+          <a:off x="0" y="0"/>
+          <a:ext cx="0" cy="0"/>
+          <a:chOff x="0" y="0"/>
+          <a:chExt cx="0" cy="0"/>
+        </a:xfrm>
+      </p:grpSpPr>
+      <p:sp>
+        <p:nvSpPr>
+          <p:cNvPr id="2" name="Slide Image Placeholder 1"/>
+          <p:cNvSpPr>
+            <a:spLocks noGrp="1"/>
+          </p:cNvSpPr>
+          <p:nvPr>
+            <p:ph type="sldImg" idx="2"/>
+          </p:nvPr>
+        </p:nvSpPr>
+        <p:spPr/>
+      </p:sp>
+      <p:sp>
+        <p:nvSpPr>
+          <p:cNvPr id="3" name="Notes Placeholder 2"/>
+          <p:cNvSpPr>
+            <a:spLocks noGrp="1"/>
+          </p:cNvSpPr>
+          <p:nvPr>
+            <p:ph type="body" idx="3" sz="quarter"/>
+          </p:nvPr>
+        </p:nvSpPr>
+        <p:spPr/>
+        <p:txBody>
+          <a:bodyPr/>
+          <a:lstStyle/>
+          <a:p>
+            <a:r>
+              <a:t>BONUS + CLOSE  |  28 sec  |  70 spoken words</a:t>
+            </a:r>
+          </a:p>
+          <a:p/>
+          <a:p>
+            <a:r>
+              <a:t>SAY:</a:t>
+            </a:r>
+          </a:p>
+          <a:p>
+            <a:r>
+              <a:t>"The bonus. The thesis is that crossing an ESG threshold unlocks a wall of</a:t>
+            </a:r>
+          </a:p>
+          <a:p>
+            <a:r>
+              <a:t>capital. We tested it. There is no threshold: fifteen of eighteen companies sit</a:t>
+            </a:r>
+          </a:p>
+          <a:p>
+            <a:r>
+              <a:t>between twenty and eighty percent likely to pass a screen.</a:t>
+            </a:r>
+          </a:p>
+          <a:p/>
+          <a:p>
+            <a:r>
+              <a:t>So the trade is the gap between where a company stands and where it is heading.</a:t>
+            </a:r>
+          </a:p>
+          <a:p>
+            <a:r>
+              <a:t>We go long the gap, short the structurally stuck, and sell when the gap closes.</a:t>
+            </a:r>
+          </a:p>
+          <a:p/>
+          <a:p>
+            <a:r>
+              <a:t>We give you the ranking the brief asked for, and the honest error bar around it.</a:t>
+            </a:r>
+          </a:p>
+          <a:p>
+            <a:r>
+              <a:t>Thank you."</a:t>
+            </a:r>
+          </a:p>
+          <a:p/>
+          <a:p>
+            <a:r>
+              <a:t>STOP AT THANK YOU.</a:t>
+            </a:r>
+          </a:p>
+        </p:txBody>
+      </p:sp>
+      <p:sp>
+        <p:nvSpPr>
+          <p:cNvPr id="4" name="Slide Number Placeholder 3"/>
+          <p:cNvSpPr>
+            <a:spLocks noGrp="1"/>
+          </p:cNvSpPr>
+          <p:nvPr>
+            <p:ph type="sldNum" idx="5" sz="quarter"/>
+          </p:nvPr>
+        </p:nvSpPr>
+        <p:spPr/>
+      </p:sp>
+    </p:spTree>
+  </p:cSld>
+  <p:clrMapOvr>
+    <a:masterClrMapping/>
+  </p:clrMapOvr>
+</p:notes>
 </file>
 
 <file path=ppt/slideLayouts/slideLayout1.xml><?xml version="1.0" encoding="utf-8"?>
@@ -3139,20 +4121,104 @@
       </p:sp>
       <p:sp>
         <p:nvSpPr>
-          <p:cNvPr id="3" name="Rectangle 2"/>
+          <p:cNvPr id="3" name="TextBox 2"/>
+          <p:cNvSpPr txBox="1"/>
+          <p:nvPr/>
+        </p:nvSpPr>
+        <p:spPr>
+          <a:xfrm>
+            <a:off x="777240" y="411480"/>
+            <a:ext cx="10607040" cy="365760"/>
+          </a:xfrm>
+          <a:prstGeom prst="rect">
+            <a:avLst/>
+          </a:prstGeom>
+          <a:noFill/>
+        </p:spPr>
+        <p:txBody>
+          <a:bodyPr wrap="square" anchor="t" lIns="0" rIns="0" tIns="0" bIns="0">
+            <a:spAutoFit/>
+          </a:bodyPr>
+          <a:lstStyle/>
+          <a:p>
+            <a:pPr algn="l">
+              <a:lnSpc>
+                <a:spcPct val="100000"/>
+              </a:lnSpc>
+              <a:spcAft>
+                <a:spcPts val="600"/>
+              </a:spcAft>
+            </a:pPr>
+            <a:r>
+              <a:rPr sz="1300" b="1">
+                <a:solidFill>
+                  <a:srgbClr val="C04A12"/>
+                </a:solidFill>
+                <a:latin typeface="Calibri"/>
+              </a:rPr>
+              <a:t>MARATHON PETROLEUM  ·  SAME DATA  ·  SAME YEAR</a:t>
+            </a:r>
+          </a:p>
+        </p:txBody>
+      </p:sp>
+      <p:sp>
+        <p:nvSpPr>
+          <p:cNvPr id="4" name="TextBox 3"/>
+          <p:cNvSpPr txBox="1"/>
+          <p:nvPr/>
+        </p:nvSpPr>
+        <p:spPr>
+          <a:xfrm>
+            <a:off x="777240" y="1051560"/>
+            <a:ext cx="10607040" cy="822960"/>
+          </a:xfrm>
+          <a:prstGeom prst="rect">
+            <a:avLst/>
+          </a:prstGeom>
+          <a:noFill/>
+        </p:spPr>
+        <p:txBody>
+          <a:bodyPr wrap="square" anchor="t" lIns="0" rIns="0" tIns="0" bIns="0">
+            <a:spAutoFit/>
+          </a:bodyPr>
+          <a:lstStyle/>
+          <a:p>
+            <a:pPr algn="l">
+              <a:lnSpc>
+                <a:spcPct val="100000"/>
+              </a:lnSpc>
+              <a:spcAft>
+                <a:spcPts val="600"/>
+              </a:spcAft>
+            </a:pPr>
+            <a:r>
+              <a:rPr sz="3400" b="0">
+                <a:solidFill>
+                  <a:srgbClr val="3D3C38"/>
+                </a:solidFill>
+                <a:latin typeface="Calibri"/>
+              </a:rPr>
+              <a:t>One company. Two defensible methods.</a:t>
+            </a:r>
+          </a:p>
+        </p:txBody>
+      </p:sp>
+      <p:sp>
+        <p:nvSpPr>
+          <p:cNvPr id="5" name="Rectangle 4"/>
           <p:cNvSpPr/>
           <p:nvPr/>
         </p:nvSpPr>
         <p:spPr>
           <a:xfrm>
-            <a:off x="777240" y="1371600"/>
-            <a:ext cx="10607040" cy="50800"/>
+            <a:off x="777240" y="2057400"/>
+            <a:ext cx="5029200" cy="2651760"/>
           </a:xfrm>
           <a:prstGeom prst="rect">
             <a:avLst/>
           </a:prstGeom>
           <a:solidFill>
-            <a:srgbClr val="101010"/>
+            <a:srgbClr val="F2F1ED"/>
           </a:solidFill>
           <a:ln>
             <a:noFill/>
@@ -3183,14 +4249,14 @@
       </p:sp>
       <p:sp>
         <p:nvSpPr>
-          <p:cNvPr id="4" name="TextBox 3"/>
+          <p:cNvPr id="6" name="TextBox 5"/>
           <p:cNvSpPr txBox="1"/>
           <p:nvPr/>
         </p:nvSpPr>
         <p:spPr>
           <a:xfrm>
-            <a:off x="777240" y="1600200"/>
-            <a:ext cx="10607040" cy="1188720"/>
+            <a:off x="1097280" y="2331720"/>
+            <a:ext cx="4389120" cy="2194560"/>
           </a:xfrm>
           <a:prstGeom prst="rect">
             <a:avLst/>
@@ -3205,104 +4271,58 @@
           <a:p>
             <a:pPr algn="l">
               <a:lnSpc>
-                <a:spcPct val="100000"/>
+                <a:spcPct val="85000"/>
               </a:lnSpc>
               <a:spcAft>
-                <a:spcPts val="600"/>
+                <a:spcPts val="0"/>
               </a:spcAft>
             </a:pPr>
             <a:r>
-              <a:rPr sz="6600" b="1">
+              <a:rPr sz="12800" b="1">
                 <a:solidFill>
                   <a:srgbClr val="101010"/>
                 </a:solidFill>
                 <a:latin typeface="Calibri"/>
               </a:rPr>
-              <a:t>CONTESTED</a:t>
-            </a:r>
-          </a:p>
-        </p:txBody>
-      </p:sp>
-      <p:sp>
-        <p:nvSpPr>
-          <p:cNvPr id="5" name="TextBox 4"/>
-          <p:cNvSpPr txBox="1"/>
-          <p:nvPr/>
-        </p:nvSpPr>
-        <p:spPr>
-          <a:xfrm>
-            <a:off x="777240" y="2788920"/>
-            <a:ext cx="10607040" cy="731520"/>
-          </a:xfrm>
-          <a:prstGeom prst="rect">
-            <a:avLst/>
-          </a:prstGeom>
-          <a:noFill/>
-        </p:spPr>
-        <p:txBody>
-          <a:bodyPr wrap="square" anchor="t" lIns="0" rIns="0" tIns="0" bIns="0">
-            <a:spAutoFit/>
-          </a:bodyPr>
-          <a:lstStyle/>
+              <a:t>15</a:t>
+            </a:r>
+          </a:p>
           <a:p>
             <a:pPr algn="l">
               <a:lnSpc>
-                <a:spcPct val="100000"/>
+                <a:spcPct val="85000"/>
               </a:lnSpc>
               <a:spcAft>
-                <a:spcPts val="600"/>
+                <a:spcPts val="0"/>
               </a:spcAft>
             </a:pPr>
             <a:r>
-              <a:rPr sz="2600" b="0">
+              <a:rPr sz="2800" b="0">
                 <a:solidFill>
                   <a:srgbClr val="3D3C38"/>
                 </a:solidFill>
                 <a:latin typeface="Calibri"/>
               </a:rPr>
-              <a:t>Every ESG score is one answer to a question nobody wrote down.</a:t>
-            </a:r>
-          </a:p>
-        </p:txBody>
-      </p:sp>
-      <p:sp>
-        <p:nvSpPr>
-          <p:cNvPr id="6" name="TextBox 5"/>
-          <p:cNvSpPr txBox="1"/>
-          <p:nvPr/>
-        </p:nvSpPr>
-        <p:spPr>
-          <a:xfrm>
-            <a:off x="777240" y="3429000"/>
-            <a:ext cx="10607040" cy="731520"/>
-          </a:xfrm>
-          <a:prstGeom prst="rect">
-            <a:avLst/>
-          </a:prstGeom>
-          <a:noFill/>
-        </p:spPr>
-        <p:txBody>
-          <a:bodyPr wrap="square" anchor="t" lIns="0" rIns="0" tIns="0" bIns="0">
-            <a:spAutoFit/>
-          </a:bodyPr>
-          <a:lstStyle/>
+              <a:t>th of 18</a:t>
+            </a:r>
+          </a:p>
           <a:p>
             <a:pPr algn="l">
               <a:lnSpc>
-                <a:spcPct val="100000"/>
+                <a:spcPct val="85000"/>
               </a:lnSpc>
               <a:spcAft>
-                <a:spcPts val="600"/>
+                <a:spcPts val="0"/>
               </a:spcAft>
             </a:pPr>
             <a:r>
-              <a:rPr sz="2600" b="1">
-                <a:solidFill>
-                  <a:srgbClr val="C04A12"/>
+              <a:rPr sz="1700" b="0">
+                <a:solidFill>
+                  <a:srgbClr val="6B6A63"/>
                 </a:solidFill>
                 <a:latin typeface="Calibri"/>
               </a:rPr>
-              <a:t>We publish the question, the answer, and how much the answer depends on the question.</a:t>
+              <a:t>on how clean it is today</a:t>
             </a:r>
           </a:p>
         </p:txBody>
@@ -3315,14 +4335,14 @@
         </p:nvSpPr>
         <p:spPr>
           <a:xfrm>
-            <a:off x="777240" y="4480560"/>
-            <a:ext cx="10607040" cy="25400"/>
+            <a:off x="6355080" y="2057400"/>
+            <a:ext cx="5029200" cy="2651760"/>
           </a:xfrm>
           <a:prstGeom prst="rect">
             <a:avLst/>
           </a:prstGeom>
           <a:solidFill>
-            <a:srgbClr val="101010"/>
+            <a:srgbClr val="F2F1ED"/>
           </a:solidFill>
           <a:ln>
             <a:noFill/>
@@ -3359,8 +4379,132 @@
         </p:nvSpPr>
         <p:spPr>
           <a:xfrm>
-            <a:off x="777240" y="4709160"/>
-            <a:ext cx="10607040" cy="822960"/>
+            <a:off x="6675120" y="2331720"/>
+            <a:ext cx="4389120" cy="2194560"/>
+          </a:xfrm>
+          <a:prstGeom prst="rect">
+            <a:avLst/>
+          </a:prstGeom>
+          <a:noFill/>
+        </p:spPr>
+        <p:txBody>
+          <a:bodyPr wrap="square" anchor="t" lIns="0" rIns="0" tIns="0" bIns="0">
+            <a:spAutoFit/>
+          </a:bodyPr>
+          <a:lstStyle/>
+          <a:p>
+            <a:pPr algn="l">
+              <a:lnSpc>
+                <a:spcPct val="85000"/>
+              </a:lnSpc>
+              <a:spcAft>
+                <a:spcPts val="0"/>
+              </a:spcAft>
+            </a:pPr>
+            <a:r>
+              <a:rPr sz="12800" b="1">
+                <a:solidFill>
+                  <a:srgbClr val="C04A12"/>
+                </a:solidFill>
+                <a:latin typeface="Calibri"/>
+              </a:rPr>
+              <a:t>6</a:t>
+            </a:r>
+          </a:p>
+          <a:p>
+            <a:pPr algn="l">
+              <a:lnSpc>
+                <a:spcPct val="85000"/>
+              </a:lnSpc>
+              <a:spcAft>
+                <a:spcPts val="0"/>
+              </a:spcAft>
+            </a:pPr>
+            <a:r>
+              <a:rPr sz="2800" b="0">
+                <a:solidFill>
+                  <a:srgbClr val="C04A12"/>
+                </a:solidFill>
+                <a:latin typeface="Calibri"/>
+              </a:rPr>
+              <a:t>th of 18</a:t>
+            </a:r>
+          </a:p>
+          <a:p>
+            <a:pPr algn="l">
+              <a:lnSpc>
+                <a:spcPct val="85000"/>
+              </a:lnSpc>
+              <a:spcAft>
+                <a:spcPts val="0"/>
+              </a:spcAft>
+            </a:pPr>
+            <a:r>
+              <a:rPr sz="1700" b="0">
+                <a:solidFill>
+                  <a:srgbClr val="6B6A63"/>
+                </a:solidFill>
+                <a:latin typeface="Calibri"/>
+              </a:rPr>
+              <a:t>on how fast it is improving</a:t>
+            </a:r>
+          </a:p>
+        </p:txBody>
+      </p:sp>
+      <p:sp>
+        <p:nvSpPr>
+          <p:cNvPr id="9" name="Rectangle 8"/>
+          <p:cNvSpPr/>
+          <p:nvPr/>
+        </p:nvSpPr>
+        <p:spPr>
+          <a:xfrm>
+            <a:off x="777240" y="5029200"/>
+            <a:ext cx="10607040" cy="38100"/>
+          </a:xfrm>
+          <a:prstGeom prst="rect">
+            <a:avLst/>
+          </a:prstGeom>
+          <a:solidFill>
+            <a:srgbClr val="101010"/>
+          </a:solidFill>
+          <a:ln>
+            <a:noFill/>
+          </a:ln>
+          <a:effectLst/>
+        </p:spPr>
+        <p:style>
+          <a:lnRef idx="1">
+            <a:schemeClr val="accent1"/>
+          </a:lnRef>
+          <a:fillRef idx="3">
+            <a:schemeClr val="accent1"/>
+          </a:fillRef>
+          <a:effectRef idx="2">
+            <a:schemeClr val="accent1"/>
+          </a:effectRef>
+          <a:fontRef idx="minor">
+            <a:schemeClr val="lt1"/>
+          </a:fontRef>
+        </p:style>
+        <p:txBody>
+          <a:bodyPr rtlCol="0" anchor="ctr"/>
+          <a:lstStyle/>
+          <a:p>
+            <a:pPr algn="ctr"/>
+          </a:p>
+        </p:txBody>
+      </p:sp>
+      <p:sp>
+        <p:nvSpPr>
+          <p:cNvPr id="10" name="TextBox 9"/>
+          <p:cNvSpPr txBox="1"/>
+          <p:nvPr/>
+        </p:nvSpPr>
+        <p:spPr>
+          <a:xfrm>
+            <a:off x="777240" y="5257800"/>
+            <a:ext cx="10607040" cy="1005840"/>
           </a:xfrm>
           <a:prstGeom prst="rect">
             <a:avLst/>
@@ -3378,59 +4522,36 @@
                 <a:spcPct val="100000"/>
               </a:lnSpc>
               <a:spcAft>
-                <a:spcPts val="600"/>
+                <a:spcPts val="400"/>
               </a:spcAft>
             </a:pPr>
             <a:r>
-              <a:rPr sz="1700" b="0">
-                <a:solidFill>
-                  <a:srgbClr val="6B6A63"/>
+              <a:rPr sz="3000" b="1">
+                <a:solidFill>
+                  <a:srgbClr val="101010"/>
                 </a:solidFill>
                 <a:latin typeface="Calibri"/>
               </a:rPr>
-              <a:t>18 S&amp;P 500 Energy companies  ·  138 indicators  ·  17,496 defensible scores each  ·  live tool</a:t>
-            </a:r>
-          </a:p>
-        </p:txBody>
-      </p:sp>
-      <p:sp>
-        <p:nvSpPr>
-          <p:cNvPr id="9" name="TextBox 8"/>
-          <p:cNvSpPr txBox="1"/>
-          <p:nvPr/>
-        </p:nvSpPr>
-        <p:spPr>
-          <a:xfrm>
-            <a:off x="777240" y="6263640"/>
-            <a:ext cx="10607040" cy="365760"/>
-          </a:xfrm>
-          <a:prstGeom prst="rect">
-            <a:avLst/>
-          </a:prstGeom>
-          <a:noFill/>
-        </p:spPr>
-        <p:txBody>
-          <a:bodyPr wrap="square" anchor="t" lIns="0" rIns="0" tIns="0" bIns="0">
-            <a:spAutoFit/>
-          </a:bodyPr>
-          <a:lstStyle/>
+              <a:t>Nine places apart. Neither number is a mistake.</a:t>
+            </a:r>
+          </a:p>
           <a:p>
             <a:pPr algn="l">
               <a:lnSpc>
                 <a:spcPct val="100000"/>
               </a:lnSpc>
               <a:spcAft>
-                <a:spcPts val="600"/>
+                <a:spcPts val="400"/>
               </a:spcAft>
             </a:pPr>
             <a:r>
-              <a:rPr sz="1100" b="0">
-                <a:solidFill>
-                  <a:srgbClr val="6B6A63"/>
+              <a:rPr sz="2400" b="1">
+                <a:solidFill>
+                  <a:srgbClr val="C04A12"/>
                 </a:solidFill>
                 <a:latin typeface="Calibri"/>
               </a:rPr>
-              <a:t>ETHack 2026 · Challenge #1 · Citadel &amp; Citadel Securities</a:t>
+              <a:t>An ESG score is one answer to a question nobody wrote down.</a:t>
             </a:r>
           </a:p>
         </p:txBody>
@@ -3505,8 +4626,8 @@
         </p:nvSpPr>
         <p:spPr>
           <a:xfrm>
-            <a:off x="777240" y="457200"/>
-            <a:ext cx="10058400" cy="365760"/>
+            <a:off x="777240" y="411480"/>
+            <a:ext cx="10607040" cy="365760"/>
           </a:xfrm>
           <a:prstGeom prst="rect">
             <a:avLst/>
@@ -3534,82 +4655,21 @@
                 </a:solidFill>
                 <a:latin typeface="Calibri"/>
               </a:rPr>
-              <a:t>THE PROBLEM</a:t>
-            </a:r>
-          </a:p>
-        </p:txBody>
-      </p:sp>
-      <p:sp>
-        <p:nvSpPr>
-          <p:cNvPr id="4" name="TextBox 3"/>
-          <p:cNvSpPr txBox="1"/>
-          <p:nvPr/>
-        </p:nvSpPr>
-        <p:spPr>
-          <a:xfrm>
-            <a:off x="777240" y="914400"/>
-            <a:ext cx="10607040" cy="914400"/>
-          </a:xfrm>
-          <a:prstGeom prst="rect">
-            <a:avLst/>
-          </a:prstGeom>
-          <a:noFill/>
-        </p:spPr>
-        <p:txBody>
-          <a:bodyPr wrap="square" anchor="t" lIns="0" rIns="0" tIns="0" bIns="0">
-            <a:spAutoFit/>
-          </a:bodyPr>
-          <a:lstStyle/>
-          <a:p>
-            <a:pPr algn="l">
-              <a:lnSpc>
-                <a:spcPct val="100000"/>
-              </a:lnSpc>
-              <a:spcAft>
-                <a:spcPts val="200"/>
-              </a:spcAft>
-            </a:pPr>
-            <a:r>
-              <a:rPr sz="3800" b="1">
-                <a:solidFill>
-                  <a:srgbClr val="101010"/>
-                </a:solidFill>
-                <a:latin typeface="Calibri"/>
-              </a:rPr>
-              <a:t>The market buys a point estimate of a quantity</a:t>
-            </a:r>
-          </a:p>
-          <a:p>
-            <a:pPr algn="l">
-              <a:lnSpc>
-                <a:spcPct val="100000"/>
-              </a:lnSpc>
-              <a:spcAft>
-                <a:spcPts val="200"/>
-              </a:spcAft>
-            </a:pPr>
-            <a:r>
-              <a:rPr sz="3800" b="1">
-                <a:solidFill>
-                  <a:srgbClr val="C04A12"/>
-                </a:solidFill>
-                <a:latin typeface="Calibri"/>
-              </a:rPr>
-              <a:t>that has no point estimate.</a:t>
-            </a:r>
-          </a:p>
-        </p:txBody>
-      </p:sp>
-      <p:sp>
-        <p:nvSpPr>
-          <p:cNvPr id="5" name="Rectangle 4"/>
+              <a:t>WHAT WE MEASURE, AND WHY THE INDUSTRY DISAGREES</a:t>
+            </a:r>
+          </a:p>
+        </p:txBody>
+      </p:sp>
+      <p:sp>
+        <p:nvSpPr>
+          <p:cNvPr id="4" name="Rectangle 3"/>
           <p:cNvSpPr/>
           <p:nvPr/>
         </p:nvSpPr>
         <p:spPr>
           <a:xfrm>
-            <a:off x="777240" y="2468880"/>
-            <a:ext cx="3246120" cy="1691640"/>
+            <a:off x="777240" y="914400"/>
+            <a:ext cx="5120640" cy="2148840"/>
           </a:xfrm>
           <a:prstGeom prst="rect">
             <a:avLst/>
@@ -3646,14 +4706,14 @@
       </p:sp>
       <p:sp>
         <p:nvSpPr>
-          <p:cNvPr id="6" name="TextBox 5"/>
+          <p:cNvPr id="5" name="TextBox 4"/>
           <p:cNvSpPr txBox="1"/>
           <p:nvPr/>
         </p:nvSpPr>
         <p:spPr>
           <a:xfrm>
-            <a:off x="1051560" y="2697480"/>
-            <a:ext cx="2743200" cy="731520"/>
+            <a:off x="1051560" y="1115568"/>
+            <a:ext cx="4572000" cy="1828800"/>
           </a:xfrm>
           <a:prstGeom prst="rect">
             <a:avLst/>
@@ -3668,85 +4728,71 @@
           <a:p>
             <a:pPr algn="l">
               <a:lnSpc>
-                <a:spcPct val="100000"/>
+                <a:spcPct val="110000"/>
               </a:lnSpc>
               <a:spcAft>
                 <a:spcPts val="600"/>
               </a:spcAft>
             </a:pPr>
             <a:r>
-              <a:rPr sz="5200" b="1">
-                <a:solidFill>
-                  <a:srgbClr val="3D3C38"/>
+              <a:rPr sz="1300" b="1">
+                <a:solidFill>
+                  <a:srgbClr val="C04A12"/>
                 </a:solidFill>
                 <a:latin typeface="Calibri"/>
               </a:rPr>
-              <a:t>0.99</a:t>
-            </a:r>
-          </a:p>
-        </p:txBody>
-      </p:sp>
-      <p:sp>
-        <p:nvSpPr>
-          <p:cNvPr id="7" name="TextBox 6"/>
-          <p:cNvSpPr txBox="1"/>
-          <p:nvPr/>
-        </p:nvSpPr>
-        <p:spPr>
-          <a:xfrm>
-            <a:off x="1051560" y="3520440"/>
-            <a:ext cx="2743200" cy="548640"/>
-          </a:xfrm>
-          <a:prstGeom prst="rect">
-            <a:avLst/>
-          </a:prstGeom>
-          <a:noFill/>
-        </p:spPr>
-        <p:txBody>
-          <a:bodyPr wrap="square" anchor="t" lIns="0" rIns="0" tIns="0" bIns="0">
-            <a:spAutoFit/>
-          </a:bodyPr>
-          <a:lstStyle/>
+              <a:t>Our definition</a:t>
+            </a:r>
+          </a:p>
           <a:p>
             <a:pPr algn="l">
               <a:lnSpc>
-                <a:spcPct val="100000"/>
+                <a:spcPct val="110000"/>
               </a:lnSpc>
               <a:spcAft>
                 <a:spcPts val="600"/>
               </a:spcAft>
             </a:pPr>
             <a:r>
-              <a:rPr sz="1500" b="0">
-                <a:solidFill>
-                  <a:srgbClr val="3D3C38"/>
+              <a:rPr sz="1700" b="0">
+                <a:solidFill>
+                  <a:srgbClr val="101010"/>
                 </a:solidFill>
                 <a:latin typeface="Calibri"/>
               </a:rPr>
-              <a:t>credit ratings agree</a:t>
-            </a:r>
-          </a:p>
-        </p:txBody>
-      </p:sp>
-      <p:sp>
-        <p:nvSpPr>
-          <p:cNvPr id="8" name="Rectangle 7"/>
+              <a:t>Less irreversible harm per unit of output than the peers making the same product, </a:t>
+            </a:r>
+            <a:r>
+              <a:rPr sz="1700" b="1">
+                <a:solidFill>
+                  <a:srgbClr val="101010"/>
+                </a:solidFill>
+                <a:latin typeface="Calibri"/>
+              </a:rPr>
+              <a:t>and a balance sheet that survives the transition.</a:t>
+            </a:r>
+          </a:p>
+        </p:txBody>
+      </p:sp>
+      <p:sp>
+        <p:nvSpPr>
+          <p:cNvPr id="6" name="Rectangle 5"/>
           <p:cNvSpPr/>
           <p:nvPr/>
         </p:nvSpPr>
         <p:spPr>
           <a:xfrm>
-            <a:off x="4389120" y="2468880"/>
-            <a:ext cx="3246120" cy="1691640"/>
+            <a:off x="777240" y="3246120"/>
+            <a:ext cx="5120640" cy="2651760"/>
           </a:xfrm>
           <a:prstGeom prst="rect">
             <a:avLst/>
           </a:prstGeom>
-          <a:solidFill>
-            <a:srgbClr val="F2F1ED"/>
-          </a:solidFill>
-          <a:ln>
-            <a:noFill/>
+          <a:noFill/>
+          <a:ln w="19050">
+            <a:solidFill>
+              <a:srgbClr val="101010"/>
+            </a:solidFill>
           </a:ln>
           <a:effectLst/>
         </p:spPr>
@@ -3774,14 +4820,14 @@
       </p:sp>
       <p:sp>
         <p:nvSpPr>
-          <p:cNvPr id="9" name="TextBox 8"/>
+          <p:cNvPr id="7" name="TextBox 6"/>
           <p:cNvSpPr txBox="1"/>
           <p:nvPr/>
         </p:nvSpPr>
         <p:spPr>
           <a:xfrm>
-            <a:off x="4663440" y="2697480"/>
-            <a:ext cx="2743200" cy="731520"/>
+            <a:off x="1051560" y="3429000"/>
+            <a:ext cx="4572000" cy="365760"/>
           </a:xfrm>
           <a:prstGeom prst="rect">
             <a:avLst/>
@@ -3803,13 +4849,115 @@
               </a:spcAft>
             </a:pPr>
             <a:r>
-              <a:rPr sz="5200" b="1">
+              <a:rPr sz="1300" b="1">
                 <a:solidFill>
                   <a:srgbClr val="C04A12"/>
                 </a:solidFill>
                 <a:latin typeface="Calibri"/>
               </a:rPr>
-              <a:t>0.61</a:t>
+              <a:t>Why ratings disagree</a:t>
+            </a:r>
+          </a:p>
+        </p:txBody>
+      </p:sp>
+      <p:sp>
+        <p:nvSpPr>
+          <p:cNvPr id="8" name="TextBox 7"/>
+          <p:cNvSpPr txBox="1"/>
+          <p:nvPr/>
+        </p:nvSpPr>
+        <p:spPr>
+          <a:xfrm>
+            <a:off x="1051560" y="3886200"/>
+            <a:ext cx="4572000" cy="502920"/>
+          </a:xfrm>
+          <a:prstGeom prst="rect">
+            <a:avLst/>
+          </a:prstGeom>
+          <a:noFill/>
+        </p:spPr>
+        <p:txBody>
+          <a:bodyPr wrap="square" anchor="t" lIns="0" rIns="0" tIns="0" bIns="0">
+            <a:spAutoFit/>
+          </a:bodyPr>
+          <a:lstStyle/>
+          <a:p>
+            <a:pPr algn="l">
+              <a:lnSpc>
+                <a:spcPct val="100000"/>
+              </a:lnSpc>
+              <a:spcAft>
+                <a:spcPts val="0"/>
+              </a:spcAft>
+            </a:pPr>
+            <a:r>
+              <a:rPr sz="2600" b="1">
+                <a:solidFill>
+                  <a:srgbClr val="C04A12"/>
+                </a:solidFill>
+                <a:latin typeface="Calibri"/>
+              </a:rPr>
+              <a:t>56%</a:t>
+            </a:r>
+            <a:r>
+              <a:rPr sz="1300" b="0">
+                <a:solidFill>
+                  <a:srgbClr val="101010"/>
+                </a:solidFill>
+                <a:latin typeface="Calibri"/>
+              </a:rPr>
+              <a:t>   measurement  ·  same thing, measured differently</a:t>
+            </a:r>
+          </a:p>
+        </p:txBody>
+      </p:sp>
+      <p:sp>
+        <p:nvSpPr>
+          <p:cNvPr id="9" name="TextBox 8"/>
+          <p:cNvSpPr txBox="1"/>
+          <p:nvPr/>
+        </p:nvSpPr>
+        <p:spPr>
+          <a:xfrm>
+            <a:off x="1051560" y="4453128"/>
+            <a:ext cx="4572000" cy="502920"/>
+          </a:xfrm>
+          <a:prstGeom prst="rect">
+            <a:avLst/>
+          </a:prstGeom>
+          <a:noFill/>
+        </p:spPr>
+        <p:txBody>
+          <a:bodyPr wrap="square" anchor="t" lIns="0" rIns="0" tIns="0" bIns="0">
+            <a:spAutoFit/>
+          </a:bodyPr>
+          <a:lstStyle/>
+          <a:p>
+            <a:pPr algn="l">
+              <a:lnSpc>
+                <a:spcPct val="100000"/>
+              </a:lnSpc>
+              <a:spcAft>
+                <a:spcPts val="0"/>
+              </a:spcAft>
+            </a:pPr>
+            <a:r>
+              <a:rPr sz="2600" b="1">
+                <a:solidFill>
+                  <a:srgbClr val="C04A12"/>
+                </a:solidFill>
+                <a:latin typeface="Calibri"/>
+              </a:rPr>
+              <a:t>38%</a:t>
+            </a:r>
+            <a:r>
+              <a:rPr sz="1300" b="0">
+                <a:solidFill>
+                  <a:srgbClr val="101010"/>
+                </a:solidFill>
+                <a:latin typeface="Calibri"/>
+              </a:rPr>
+              <a:t>   scope  ·  what counts at all</a:t>
             </a:r>
           </a:p>
         </p:txBody>
@@ -3822,8 +4970,59 @@
         </p:nvSpPr>
         <p:spPr>
           <a:xfrm>
-            <a:off x="4663440" y="3520440"/>
-            <a:ext cx="2743200" cy="548640"/>
+            <a:off x="1051560" y="5020056"/>
+            <a:ext cx="4572000" cy="502920"/>
+          </a:xfrm>
+          <a:prstGeom prst="rect">
+            <a:avLst/>
+          </a:prstGeom>
+          <a:noFill/>
+        </p:spPr>
+        <p:txBody>
+          <a:bodyPr wrap="square" anchor="t" lIns="0" rIns="0" tIns="0" bIns="0">
+            <a:spAutoFit/>
+          </a:bodyPr>
+          <a:lstStyle/>
+          <a:p>
+            <a:pPr algn="l">
+              <a:lnSpc>
+                <a:spcPct val="100000"/>
+              </a:lnSpc>
+              <a:spcAft>
+                <a:spcPts val="0"/>
+              </a:spcAft>
+            </a:pPr>
+            <a:r>
+              <a:rPr sz="2600" b="1">
+                <a:solidFill>
+                  <a:srgbClr val="6B6A63"/>
+                </a:solidFill>
+                <a:latin typeface="Calibri"/>
+              </a:rPr>
+              <a:t>6%</a:t>
+            </a:r>
+            <a:r>
+              <a:rPr sz="1300" b="0">
+                <a:solidFill>
+                  <a:srgbClr val="6B6A63"/>
+                </a:solidFill>
+                <a:latin typeface="Calibri"/>
+              </a:rPr>
+              <a:t>   weights  ·  the slider everyone argues about</a:t>
+            </a:r>
+          </a:p>
+        </p:txBody>
+      </p:sp>
+      <p:sp>
+        <p:nvSpPr>
+          <p:cNvPr id="11" name="TextBox 10"/>
+          <p:cNvSpPr txBox="1"/>
+          <p:nvPr/>
+        </p:nvSpPr>
+        <p:spPr>
+          <a:xfrm>
+            <a:off x="1051560" y="5532120"/>
+            <a:ext cx="4572000" cy="320040"/>
           </a:xfrm>
           <a:prstGeom prst="rect">
             <a:avLst/>
@@ -3845,71 +5044,51 @@
               </a:spcAft>
             </a:pPr>
             <a:r>
-              <a:rPr sz="1500" b="0">
-                <a:solidFill>
-                  <a:srgbClr val="3D3C38"/>
+              <a:rPr sz="1000" b="0">
+                <a:solidFill>
+                  <a:srgbClr val="6B6A63"/>
                 </a:solidFill>
                 <a:latin typeface="Calibri"/>
               </a:rPr>
-              <a:t>ESG ratings agree</a:t>
-            </a:r>
-          </a:p>
-        </p:txBody>
-      </p:sp>
-      <p:sp>
-        <p:nvSpPr>
-          <p:cNvPr id="11" name="Rectangle 10"/>
-          <p:cNvSpPr/>
+              <a:t>Berg, Kolbel &amp; Rigobon, Review of Finance 2022</a:t>
+            </a:r>
+          </a:p>
+        </p:txBody>
+      </p:sp>
+      <p:pic>
+        <p:nvPicPr>
+          <p:cNvPr id="12" name="Picture 11" descr="f1_two_questions.png"/>
+          <p:cNvPicPr>
+            <a:picLocks noChangeAspect="1"/>
+          </p:cNvPicPr>
           <p:nvPr/>
-        </p:nvSpPr>
-        <p:spPr>
-          <a:xfrm>
-            <a:off x="8001000" y="2468880"/>
-            <a:ext cx="3246120" cy="1691640"/>
+        </p:nvPicPr>
+        <p:blipFill>
+          <a:blip r:embed="rId2"/>
+          <a:stretch>
+            <a:fillRect/>
+          </a:stretch>
+        </p:blipFill>
+        <p:spPr>
+          <a:xfrm>
+            <a:off x="6172200" y="960120"/>
+            <a:ext cx="5486400" cy="2590800"/>
           </a:xfrm>
           <a:prstGeom prst="rect">
             <a:avLst/>
           </a:prstGeom>
-          <a:solidFill>
-            <a:srgbClr val="F2F1ED"/>
-          </a:solidFill>
-          <a:ln>
-            <a:noFill/>
-          </a:ln>
-          <a:effectLst/>
-        </p:spPr>
-        <p:style>
-          <a:lnRef idx="1">
-            <a:schemeClr val="accent1"/>
-          </a:lnRef>
-          <a:fillRef idx="3">
-            <a:schemeClr val="accent1"/>
-          </a:fillRef>
-          <a:effectRef idx="2">
-            <a:schemeClr val="accent1"/>
-          </a:effectRef>
-          <a:fontRef idx="minor">
-            <a:schemeClr val="lt1"/>
-          </a:fontRef>
-        </p:style>
-        <p:txBody>
-          <a:bodyPr rtlCol="0" anchor="ctr"/>
-          <a:lstStyle/>
-          <a:p>
-            <a:pPr algn="ctr"/>
-          </a:p>
-        </p:txBody>
-      </p:sp>
-      <p:sp>
-        <p:nvSpPr>
-          <p:cNvPr id="12" name="TextBox 11"/>
+        </p:spPr>
+      </p:pic>
+      <p:sp>
+        <p:nvSpPr>
+          <p:cNvPr id="13" name="TextBox 12"/>
           <p:cNvSpPr txBox="1"/>
           <p:nvPr/>
         </p:nvSpPr>
         <p:spPr>
           <a:xfrm>
-            <a:off x="8275320" y="2697480"/>
-            <a:ext cx="2743200" cy="731520"/>
+            <a:off x="6172200" y="5029200"/>
+            <a:ext cx="5486400" cy="822960"/>
           </a:xfrm>
           <a:prstGeom prst="rect">
             <a:avLst/>
@@ -3924,155 +5103,39 @@
           <a:p>
             <a:pPr algn="l">
               <a:lnSpc>
-                <a:spcPct val="100000"/>
+                <a:spcPct val="110000"/>
               </a:lnSpc>
               <a:spcAft>
-                <a:spcPts val="600"/>
+                <a:spcPts val="300"/>
               </a:spcAft>
             </a:pPr>
             <a:r>
-              <a:rPr sz="5200" b="1">
-                <a:solidFill>
-                  <a:srgbClr val="3D3C38"/>
+              <a:rPr sz="1500" b="1">
+                <a:solidFill>
+                  <a:srgbClr val="101010"/>
                 </a:solidFill>
                 <a:latin typeface="Calibri"/>
               </a:rPr>
-              <a:t>6%</a:t>
-            </a:r>
-          </a:p>
-        </p:txBody>
-      </p:sp>
-      <p:sp>
-        <p:nvSpPr>
-          <p:cNvPr id="13" name="TextBox 12"/>
-          <p:cNvSpPr txBox="1"/>
-          <p:nvPr/>
-        </p:nvSpPr>
-        <p:spPr>
-          <a:xfrm>
-            <a:off x="8275320" y="3520440"/>
-            <a:ext cx="2743200" cy="548640"/>
-          </a:xfrm>
-          <a:prstGeom prst="rect">
-            <a:avLst/>
-          </a:prstGeom>
-          <a:noFill/>
-        </p:spPr>
-        <p:txBody>
-          <a:bodyPr wrap="square" anchor="t" lIns="0" rIns="0" tIns="0" bIns="0">
-            <a:spAutoFit/>
-          </a:bodyPr>
-          <a:lstStyle/>
+              <a:t>All 18 companies, both questions.</a:t>
+            </a:r>
+          </a:p>
           <a:p>
             <a:pPr algn="l">
               <a:lnSpc>
-                <a:spcPct val="100000"/>
+                <a:spcPct val="110000"/>
               </a:lnSpc>
               <a:spcAft>
-                <a:spcPts val="600"/>
+                <a:spcPts val="300"/>
               </a:spcAft>
             </a:pPr>
             <a:r>
-              <a:rPr sz="1500" b="0">
-                <a:solidFill>
-                  <a:srgbClr val="3D3C38"/>
+              <a:rPr sz="1300" b="0">
+                <a:solidFill>
+                  <a:srgbClr val="6B6A63"/>
                 </a:solidFill>
                 <a:latin typeface="Calibri"/>
               </a:rPr>
-              <a:t>of the gap is pillar weights</a:t>
-            </a:r>
-          </a:p>
-        </p:txBody>
-      </p:sp>
-      <p:sp>
-        <p:nvSpPr>
-          <p:cNvPr id="14" name="TextBox 13"/>
-          <p:cNvSpPr txBox="1"/>
-          <p:nvPr/>
-        </p:nvSpPr>
-        <p:spPr>
-          <a:xfrm>
-            <a:off x="777240" y="4526280"/>
-            <a:ext cx="10607040" cy="1280160"/>
-          </a:xfrm>
-          <a:prstGeom prst="rect">
-            <a:avLst/>
-          </a:prstGeom>
-          <a:noFill/>
-        </p:spPr>
-        <p:txBody>
-          <a:bodyPr wrap="square" anchor="t" lIns="0" rIns="0" tIns="0" bIns="0">
-            <a:spAutoFit/>
-          </a:bodyPr>
-          <a:lstStyle/>
-          <a:p>
-            <a:pPr algn="l">
-              <a:lnSpc>
-                <a:spcPct val="125000"/>
-              </a:lnSpc>
-              <a:spcAft>
-                <a:spcPts val="600"/>
-              </a:spcAft>
-            </a:pPr>
-            <a:r>
-              <a:rPr sz="2000" b="0">
-                <a:solidFill>
-                  <a:srgbClr val="3D3C38"/>
-                </a:solidFill>
-                <a:latin typeface="Calibri"/>
-              </a:rPr>
-              <a:t>Providers compute a distribution over method choices, publish one draw, and throw the rest away. </a:t>
-            </a:r>
-            <a:r>
-              <a:rPr sz="2000" b="1">
-                <a:solidFill>
-                  <a:srgbClr val="101010"/>
-                </a:solidFill>
-                <a:latin typeface="Calibri"/>
-              </a:rPr>
-              <a:t>The thrown-away part is the part an allocator needs.</a:t>
-            </a:r>
-          </a:p>
-        </p:txBody>
-      </p:sp>
-      <p:sp>
-        <p:nvSpPr>
-          <p:cNvPr id="15" name="TextBox 14"/>
-          <p:cNvSpPr txBox="1"/>
-          <p:nvPr/>
-        </p:nvSpPr>
-        <p:spPr>
-          <a:xfrm>
-            <a:off x="777240" y="6263640"/>
-            <a:ext cx="10607040" cy="365760"/>
-          </a:xfrm>
-          <a:prstGeom prst="rect">
-            <a:avLst/>
-          </a:prstGeom>
-          <a:noFill/>
-        </p:spPr>
-        <p:txBody>
-          <a:bodyPr wrap="square" anchor="t" lIns="0" rIns="0" tIns="0" bIns="0">
-            <a:spAutoFit/>
-          </a:bodyPr>
-          <a:lstStyle/>
-          <a:p>
-            <a:pPr algn="l">
-              <a:lnSpc>
-                <a:spcPct val="100000"/>
-              </a:lnSpc>
-              <a:spcAft>
-                <a:spcPts val="600"/>
-              </a:spcAft>
-            </a:pPr>
-            <a:r>
-              <a:rPr sz="1100" b="0">
-                <a:solidFill>
-                  <a:srgbClr val="6B6A63"/>
-                </a:solidFill>
-                <a:latin typeface="Calibri"/>
-              </a:rPr>
-              <a:t>Berg, Kölbel &amp; Rigobon, Review of Finance 2022. Divergence: measurement 56%, scope 38%, weights 6%.</a:t>
+              <a:t>Blue is where they stand. Orange is where they are heading. The bars are how far the answer moves on method choice alone.</a:t>
             </a:r>
           </a:p>
         </p:txBody>
@@ -4147,8 +5210,8 @@
         </p:nvSpPr>
         <p:spPr>
           <a:xfrm>
-            <a:off x="777240" y="457200"/>
-            <a:ext cx="10058400" cy="365760"/>
+            <a:off x="777240" y="411480"/>
+            <a:ext cx="10607040" cy="365760"/>
           </a:xfrm>
           <a:prstGeom prst="rect">
             <a:avLst/>
@@ -4176,7 +5239,7 @@
                 </a:solidFill>
                 <a:latin typeface="Calibri"/>
               </a:rPr>
-              <a:t>WHAT WE BUILT</a:t>
+              <a:t>WHY THE ENERGY SECTOR</a:t>
             </a:r>
           </a:p>
         </p:txBody>
@@ -4189,8 +5252,8 @@
         </p:nvSpPr>
         <p:spPr>
           <a:xfrm>
-            <a:off x="777240" y="868680"/>
-            <a:ext cx="10607040" cy="685800"/>
+            <a:off x="777240" y="914400"/>
+            <a:ext cx="10607040" cy="731520"/>
           </a:xfrm>
           <a:prstGeom prst="rect">
             <a:avLst/>
@@ -4212,78 +5275,27 @@
               </a:spcAft>
             </a:pPr>
             <a:r>
-              <a:rPr sz="2900" b="0">
+              <a:rPr sz="3000" b="1">
                 <a:solidFill>
                   <a:srgbClr val="101010"/>
                 </a:solidFill>
                 <a:latin typeface="Calibri"/>
               </a:rPr>
-              <a:t>We read MSCI's and Bloomberg's methodologies and found </a:t>
-            </a:r>
-            <a:r>
-              <a:rPr sz="2900" b="1">
-                <a:solidFill>
-                  <a:srgbClr val="101010"/>
-                </a:solidFill>
-                <a:latin typeface="Calibri"/>
-              </a:rPr>
-              <a:t>13 places a rater must choose.</a:t>
-            </a:r>
-          </a:p>
-        </p:txBody>
-      </p:sp>
-      <p:sp>
-        <p:nvSpPr>
-          <p:cNvPr id="5" name="TextBox 4"/>
-          <p:cNvSpPr txBox="1"/>
-          <p:nvPr/>
-        </p:nvSpPr>
-        <p:spPr>
-          <a:xfrm>
-            <a:off x="777240" y="1508760"/>
-            <a:ext cx="10607040" cy="502920"/>
-          </a:xfrm>
-          <a:prstGeom prst="rect">
-            <a:avLst/>
-          </a:prstGeom>
-          <a:noFill/>
-        </p:spPr>
-        <p:txBody>
-          <a:bodyPr wrap="square" anchor="t" lIns="0" rIns="0" tIns="0" bIns="0">
-            <a:spAutoFit/>
-          </a:bodyPr>
-          <a:lstStyle/>
-          <a:p>
-            <a:pPr algn="l">
-              <a:lnSpc>
-                <a:spcPct val="100000"/>
-              </a:lnSpc>
-              <a:spcAft>
-                <a:spcPts val="600"/>
-              </a:spcAft>
-            </a:pPr>
-            <a:r>
-              <a:rPr sz="1900" b="0">
-                <a:solidFill>
-                  <a:srgbClr val="3D3C38"/>
-                </a:solidFill>
-                <a:latin typeface="Calibri"/>
-              </a:rPr>
-              <a:t>They differ at seven. We vary those, fix the rest, and declare every assumption.</a:t>
-            </a:r>
-          </a:p>
-        </p:txBody>
-      </p:sp>
-      <p:sp>
-        <p:nvSpPr>
-          <p:cNvPr id="6" name="Rectangle 5"/>
+              <a:t>The hardest place to score, so the best place to test.</a:t>
+            </a:r>
+          </a:p>
+        </p:txBody>
+      </p:sp>
+      <p:sp>
+        <p:nvSpPr>
+          <p:cNvPr id="5" name="Rectangle 4"/>
           <p:cNvSpPr/>
           <p:nvPr/>
         </p:nvSpPr>
         <p:spPr>
           <a:xfrm>
-            <a:off x="777240" y="2240280"/>
-            <a:ext cx="3246120" cy="868680"/>
+            <a:off x="777240" y="1965960"/>
+            <a:ext cx="5074920" cy="1143000"/>
           </a:xfrm>
           <a:prstGeom prst="rect">
             <a:avLst/>
@@ -4320,14 +5332,14 @@
       </p:sp>
       <p:sp>
         <p:nvSpPr>
-          <p:cNvPr id="7" name="TextBox 6"/>
+          <p:cNvPr id="6" name="TextBox 5"/>
           <p:cNvSpPr txBox="1"/>
           <p:nvPr/>
         </p:nvSpPr>
         <p:spPr>
           <a:xfrm>
-            <a:off x="978408" y="2359152"/>
-            <a:ext cx="2926080" cy="320040"/>
+            <a:off x="1051560" y="2130552"/>
+            <a:ext cx="4572000" cy="411480"/>
           </a:xfrm>
           <a:prstGeom prst="rect">
             <a:avLst/>
@@ -4349,27 +5361,27 @@
               </a:spcAft>
             </a:pPr>
             <a:r>
-              <a:rPr sz="1500" b="1">
-                <a:solidFill>
-                  <a:srgbClr val="101010"/>
+              <a:rPr sz="2200" b="1">
+                <a:solidFill>
+                  <a:srgbClr val="C04A12"/>
                 </a:solidFill>
                 <a:latin typeface="Calibri"/>
               </a:rPr>
-              <a:t>Exposure base</a:t>
-            </a:r>
-          </a:p>
-        </p:txBody>
-      </p:sp>
-      <p:sp>
-        <p:nvSpPr>
-          <p:cNvPr id="8" name="TextBox 7"/>
+              <a:t>Only 3 of 37</a:t>
+            </a:r>
+          </a:p>
+        </p:txBody>
+      </p:sp>
+      <p:sp>
+        <p:nvSpPr>
+          <p:cNvPr id="7" name="TextBox 6"/>
           <p:cNvSpPr txBox="1"/>
           <p:nvPr/>
         </p:nvSpPr>
         <p:spPr>
           <a:xfrm>
-            <a:off x="978408" y="2697480"/>
-            <a:ext cx="2926080" cy="320040"/>
+            <a:off x="1051560" y="2624328"/>
+            <a:ext cx="4572000" cy="411480"/>
           </a:xfrm>
           <a:prstGeom prst="rect">
             <a:avLst/>
@@ -4391,27 +5403,27 @@
               </a:spcAft>
             </a:pPr>
             <a:r>
-              <a:rPr sz="1200" b="0">
-                <a:solidFill>
-                  <a:srgbClr val="6B6A63"/>
+              <a:rPr sz="1400" b="0">
+                <a:solidFill>
+                  <a:srgbClr val="3D3C38"/>
                 </a:solidFill>
                 <a:latin typeface="Calibri"/>
               </a:rPr>
-              <a:t>EBITDA · equity · output</a:t>
-            </a:r>
-          </a:p>
-        </p:txBody>
-      </p:sp>
-      <p:sp>
-        <p:nvSpPr>
-          <p:cNvPr id="9" name="Rectangle 8"/>
+              <a:t>environmental fields are reported by all 18 companies</a:t>
+            </a:r>
+          </a:p>
+        </p:txBody>
+      </p:sp>
+      <p:sp>
+        <p:nvSpPr>
+          <p:cNvPr id="8" name="Rectangle 7"/>
           <p:cNvSpPr/>
           <p:nvPr/>
         </p:nvSpPr>
         <p:spPr>
           <a:xfrm>
-            <a:off x="4389120" y="2240280"/>
-            <a:ext cx="3246120" cy="868680"/>
+            <a:off x="6217920" y="1965960"/>
+            <a:ext cx="5074920" cy="1143000"/>
           </a:xfrm>
           <a:prstGeom prst="rect">
             <a:avLst/>
@@ -4448,14 +5460,14 @@
       </p:sp>
       <p:sp>
         <p:nvSpPr>
-          <p:cNvPr id="10" name="TextBox 9"/>
+          <p:cNvPr id="9" name="TextBox 8"/>
           <p:cNvSpPr txBox="1"/>
           <p:nvPr/>
         </p:nvSpPr>
         <p:spPr>
           <a:xfrm>
-            <a:off x="4590288" y="2359152"/>
-            <a:ext cx="2926080" cy="320040"/>
+            <a:off x="6492240" y="2130552"/>
+            <a:ext cx="4572000" cy="411480"/>
           </a:xfrm>
           <a:prstGeom prst="rect">
             <a:avLst/>
@@ -4477,27 +5489,27 @@
               </a:spcAft>
             </a:pPr>
             <a:r>
-              <a:rPr sz="1500" b="1">
-                <a:solidFill>
-                  <a:srgbClr val="101010"/>
+              <a:rPr sz="2200" b="1">
+                <a:solidFill>
+                  <a:srgbClr val="C04A12"/>
                 </a:solidFill>
                 <a:latin typeface="Calibri"/>
               </a:rPr>
-              <a:t>Normaliser</a:t>
-            </a:r>
-          </a:p>
-        </p:txBody>
-      </p:sp>
-      <p:sp>
-        <p:nvSpPr>
-          <p:cNvPr id="11" name="TextBox 10"/>
+              <a:t>Scope 3 absent</a:t>
+            </a:r>
+          </a:p>
+        </p:txBody>
+      </p:sp>
+      <p:sp>
+        <p:nvSpPr>
+          <p:cNvPr id="10" name="TextBox 9"/>
           <p:cNvSpPr txBox="1"/>
           <p:nvPr/>
         </p:nvSpPr>
         <p:spPr>
           <a:xfrm>
-            <a:off x="4590288" y="2697480"/>
-            <a:ext cx="2926080" cy="320040"/>
+            <a:off x="6492240" y="2624328"/>
+            <a:ext cx="4572000" cy="411480"/>
           </a:xfrm>
           <a:prstGeom prst="rect">
             <a:avLst/>
@@ -4519,27 +5531,27 @@
               </a:spcAft>
             </a:pPr>
             <a:r>
-              <a:rPr sz="1200" b="0">
-                <a:solidFill>
-                  <a:srgbClr val="6B6A63"/>
+              <a:rPr sz="1400" b="0">
+                <a:solidFill>
+                  <a:srgbClr val="3D3C38"/>
                 </a:solidFill>
                 <a:latin typeface="Calibri"/>
               </a:rPr>
-              <a:t>percentile · winsorised · log · elasticity</a:t>
-            </a:r>
-          </a:p>
-        </p:txBody>
-      </p:sp>
-      <p:sp>
-        <p:nvSpPr>
-          <p:cNvPr id="12" name="Rectangle 11"/>
+              <a:t>from every field Bloomberg delivers for these peer groups</a:t>
+            </a:r>
+          </a:p>
+        </p:txBody>
+      </p:sp>
+      <p:sp>
+        <p:nvSpPr>
+          <p:cNvPr id="11" name="Rectangle 10"/>
           <p:cNvSpPr/>
           <p:nvPr/>
         </p:nvSpPr>
         <p:spPr>
           <a:xfrm>
-            <a:off x="8001000" y="2240280"/>
-            <a:ext cx="3246120" cy="868680"/>
+            <a:off x="777240" y="3337560"/>
+            <a:ext cx="5074920" cy="1143000"/>
           </a:xfrm>
           <a:prstGeom prst="rect">
             <a:avLst/>
@@ -4576,14 +5588,14 @@
       </p:sp>
       <p:sp>
         <p:nvSpPr>
-          <p:cNvPr id="13" name="TextBox 12"/>
+          <p:cNvPr id="12" name="TextBox 11"/>
           <p:cNvSpPr txBox="1"/>
           <p:nvPr/>
         </p:nvSpPr>
         <p:spPr>
           <a:xfrm>
-            <a:off x="8202168" y="2359152"/>
-            <a:ext cx="2926080" cy="320040"/>
+            <a:off x="1051560" y="3502152"/>
+            <a:ext cx="4572000" cy="411480"/>
           </a:xfrm>
           <a:prstGeom prst="rect">
             <a:avLst/>
@@ -4605,27 +5617,27 @@
               </a:spcAft>
             </a:pPr>
             <a:r>
-              <a:rPr sz="1500" b="1">
-                <a:solidFill>
-                  <a:srgbClr val="101010"/>
+              <a:rPr sz="2200" b="1">
+                <a:solidFill>
+                  <a:srgbClr val="C04A12"/>
                 </a:solidFill>
                 <a:latin typeface="Calibri"/>
               </a:rPr>
-              <a:t>Evidence bar</a:t>
-            </a:r>
-          </a:p>
-        </p:txBody>
-      </p:sp>
-      <p:sp>
-        <p:nvSpPr>
-          <p:cNvPr id="14" name="TextBox 13"/>
+              <a:t>FY2025 is 36%</a:t>
+            </a:r>
+          </a:p>
+        </p:txBody>
+      </p:sp>
+      <p:sp>
+        <p:nvSpPr>
+          <p:cNvPr id="13" name="TextBox 12"/>
           <p:cNvSpPr txBox="1"/>
           <p:nvPr/>
         </p:nvSpPr>
         <p:spPr>
           <a:xfrm>
-            <a:off x="8202168" y="2697480"/>
-            <a:ext cx="2926080" cy="320040"/>
+            <a:off x="1051560" y="3995928"/>
+            <a:ext cx="4572000" cy="411480"/>
           </a:xfrm>
           <a:prstGeom prst="rect">
             <a:avLst/>
@@ -4647,27 +5659,27 @@
               </a:spcAft>
             </a:pPr>
             <a:r>
-              <a:rPr sz="1200" b="0">
-                <a:solidFill>
-                  <a:srgbClr val="6B6A63"/>
+              <a:rPr sz="1400" b="0">
+                <a:solidFill>
+                  <a:srgbClr val="3D3C38"/>
                 </a:solidFill>
                 <a:latin typeface="Calibri"/>
               </a:rPr>
-              <a:t>permissive · majority · strict</a:t>
-            </a:r>
-          </a:p>
-        </p:txBody>
-      </p:sp>
-      <p:sp>
-        <p:nvSpPr>
-          <p:cNvPr id="15" name="Rectangle 14"/>
+              <a:t>complete for environmental data. The lag is structural</a:t>
+            </a:r>
+          </a:p>
+        </p:txBody>
+      </p:sp>
+      <p:sp>
+        <p:nvSpPr>
+          <p:cNvPr id="14" name="Rectangle 13"/>
           <p:cNvSpPr/>
           <p:nvPr/>
         </p:nvSpPr>
         <p:spPr>
           <a:xfrm>
-            <a:off x="777240" y="3264408"/>
-            <a:ext cx="3246120" cy="868680"/>
+            <a:off x="6217920" y="3337560"/>
+            <a:ext cx="5074920" cy="1143000"/>
           </a:xfrm>
           <a:prstGeom prst="rect">
             <a:avLst/>
@@ -4704,14 +5716,14 @@
       </p:sp>
       <p:sp>
         <p:nvSpPr>
-          <p:cNvPr id="16" name="TextBox 15"/>
+          <p:cNvPr id="15" name="TextBox 14"/>
           <p:cNvSpPr txBox="1"/>
           <p:nvPr/>
         </p:nvSpPr>
         <p:spPr>
           <a:xfrm>
-            <a:off x="978408" y="3383280"/>
-            <a:ext cx="2926080" cy="320040"/>
+            <a:off x="6492240" y="3502152"/>
+            <a:ext cx="4572000" cy="411480"/>
           </a:xfrm>
           <a:prstGeom prst="rect">
             <a:avLst/>
@@ -4733,27 +5745,27 @@
               </a:spcAft>
             </a:pPr>
             <a:r>
-              <a:rPr sz="1500" b="1">
-                <a:solidFill>
-                  <a:srgbClr val="101010"/>
+              <a:rPr sz="2200" b="1">
+                <a:solidFill>
+                  <a:srgbClr val="C04A12"/>
                 </a:solidFill>
                 <a:latin typeface="Calibri"/>
               </a:rPr>
-              <a:t>Missing data</a:t>
-            </a:r>
-          </a:p>
-        </p:txBody>
-      </p:sp>
-      <p:sp>
-        <p:nvSpPr>
-          <p:cNvPr id="17" name="TextBox 16"/>
+              <a:t>18 seconds</a:t>
+            </a:r>
+          </a:p>
+        </p:txBody>
+      </p:sp>
+      <p:sp>
+        <p:nvSpPr>
+          <p:cNvPr id="16" name="TextBox 15"/>
           <p:cNvSpPr txBox="1"/>
           <p:nvPr/>
         </p:nvSpPr>
         <p:spPr>
           <a:xfrm>
-            <a:off x="978408" y="3721608"/>
-            <a:ext cx="2926080" cy="320040"/>
+            <a:off x="6492240" y="3995928"/>
+            <a:ext cx="4572000" cy="411480"/>
           </a:xfrm>
           <a:prstGeom prst="rect">
             <a:avLst/>
@@ -4775,36 +5787,36 @@
               </a:spcAft>
             </a:pPr>
             <a:r>
-              <a:rPr sz="1200" b="0">
-                <a:solidFill>
-                  <a:srgbClr val="6B6A63"/>
+              <a:rPr sz="1400" b="0">
+                <a:solidFill>
+                  <a:srgbClr val="3D3C38"/>
                 </a:solidFill>
                 <a:latin typeface="Calibri"/>
               </a:rPr>
-              <a:t>excluded · worst case · capped</a:t>
-            </a:r>
-          </a:p>
-        </p:txBody>
-      </p:sp>
-      <p:sp>
-        <p:nvSpPr>
-          <p:cNvPr id="18" name="Rectangle 17"/>
+              <a:t>to run all 17,496 specifications on a laptop</a:t>
+            </a:r>
+          </a:p>
+        </p:txBody>
+      </p:sp>
+      <p:sp>
+        <p:nvSpPr>
+          <p:cNvPr id="17" name="Rectangle 16"/>
           <p:cNvSpPr/>
           <p:nvPr/>
         </p:nvSpPr>
         <p:spPr>
           <a:xfrm>
-            <a:off x="4389120" y="3264408"/>
-            <a:ext cx="3246120" cy="868680"/>
+            <a:off x="777240" y="4937760"/>
+            <a:ext cx="10607040" cy="1051560"/>
           </a:xfrm>
           <a:prstGeom prst="rect">
             <a:avLst/>
           </a:prstGeom>
-          <a:solidFill>
-            <a:srgbClr val="F2F1ED"/>
-          </a:solidFill>
-          <a:ln>
-            <a:noFill/>
+          <a:noFill/>
+          <a:ln w="31750">
+            <a:solidFill>
+              <a:srgbClr val="C04A12"/>
+            </a:solidFill>
           </a:ln>
           <a:effectLst/>
         </p:spPr>
@@ -4832,14 +5844,14 @@
       </p:sp>
       <p:sp>
         <p:nvSpPr>
-          <p:cNvPr id="19" name="TextBox 18"/>
+          <p:cNvPr id="18" name="TextBox 17"/>
           <p:cNvSpPr txBox="1"/>
           <p:nvPr/>
         </p:nvSpPr>
         <p:spPr>
           <a:xfrm>
-            <a:off x="4590288" y="3383280"/>
-            <a:ext cx="2926080" cy="320040"/>
+            <a:off x="1097280" y="5166360"/>
+            <a:ext cx="10058400" cy="640080"/>
           </a:xfrm>
           <a:prstGeom prst="rect">
             <a:avLst/>
@@ -4861,329 +5873,22 @@
               </a:spcAft>
             </a:pPr>
             <a:r>
-              <a:rPr sz="1500" b="1">
+              <a:rPr sz="2000" b="1">
                 <a:solidFill>
                   <a:srgbClr val="101010"/>
                 </a:solidFill>
                 <a:latin typeface="Calibri"/>
               </a:rPr>
-              <a:t>Aggregation</a:t>
-            </a:r>
-          </a:p>
-        </p:txBody>
-      </p:sp>
-      <p:sp>
-        <p:nvSpPr>
-          <p:cNvPr id="20" name="TextBox 19"/>
-          <p:cNvSpPr txBox="1"/>
-          <p:nvPr/>
-        </p:nvSpPr>
-        <p:spPr>
-          <a:xfrm>
-            <a:off x="4590288" y="3721608"/>
-            <a:ext cx="2926080" cy="320040"/>
-          </a:xfrm>
-          <a:prstGeom prst="rect">
-            <a:avLst/>
-          </a:prstGeom>
-          <a:noFill/>
-        </p:spPr>
-        <p:txBody>
-          <a:bodyPr wrap="square" anchor="t" lIns="0" rIns="0" tIns="0" bIns="0">
-            <a:spAutoFit/>
-          </a:bodyPr>
-          <a:lstStyle/>
-          <a:p>
-            <a:pPr algn="l">
-              <a:lnSpc>
-                <a:spcPct val="100000"/>
-              </a:lnSpc>
-              <a:spcAft>
-                <a:spcPts val="600"/>
-              </a:spcAft>
-            </a:pPr>
-            <a:r>
-              <a:rPr sz="1200" b="0">
-                <a:solidFill>
-                  <a:srgbClr val="6B6A63"/>
+              <a:t>If the framework survives here, it survives anywhere. </a:t>
+            </a:r>
+            <a:r>
+              <a:rPr sz="2000" b="0">
+                <a:solidFill>
+                  <a:srgbClr val="101010"/>
                 </a:solidFill>
                 <a:latin typeface="Calibri"/>
               </a:rPr>
-              <a:t>arithmetic · power · geometric</a:t>
-            </a:r>
-          </a:p>
-        </p:txBody>
-      </p:sp>
-      <p:sp>
-        <p:nvSpPr>
-          <p:cNvPr id="21" name="Rectangle 20"/>
-          <p:cNvSpPr/>
-          <p:nvPr/>
-        </p:nvSpPr>
-        <p:spPr>
-          <a:xfrm>
-            <a:off x="8001000" y="3264408"/>
-            <a:ext cx="3246120" cy="868680"/>
-          </a:xfrm>
-          <a:prstGeom prst="rect">
-            <a:avLst/>
-          </a:prstGeom>
-          <a:solidFill>
-            <a:srgbClr val="F2F1ED"/>
-          </a:solidFill>
-          <a:ln>
-            <a:noFill/>
-          </a:ln>
-          <a:effectLst/>
-        </p:spPr>
-        <p:style>
-          <a:lnRef idx="1">
-            <a:schemeClr val="accent1"/>
-          </a:lnRef>
-          <a:fillRef idx="3">
-            <a:schemeClr val="accent1"/>
-          </a:fillRef>
-          <a:effectRef idx="2">
-            <a:schemeClr val="accent1"/>
-          </a:effectRef>
-          <a:fontRef idx="minor">
-            <a:schemeClr val="lt1"/>
-          </a:fontRef>
-        </p:style>
-        <p:txBody>
-          <a:bodyPr rtlCol="0" anchor="ctr"/>
-          <a:lstStyle/>
-          <a:p>
-            <a:pPr algn="ctr"/>
-          </a:p>
-        </p:txBody>
-      </p:sp>
-      <p:sp>
-        <p:nvSpPr>
-          <p:cNvPr id="22" name="TextBox 21"/>
-          <p:cNvSpPr txBox="1"/>
-          <p:nvPr/>
-        </p:nvSpPr>
-        <p:spPr>
-          <a:xfrm>
-            <a:off x="8202168" y="3383280"/>
-            <a:ext cx="2926080" cy="320040"/>
-          </a:xfrm>
-          <a:prstGeom prst="rect">
-            <a:avLst/>
-          </a:prstGeom>
-          <a:noFill/>
-        </p:spPr>
-        <p:txBody>
-          <a:bodyPr wrap="square" anchor="t" lIns="0" rIns="0" tIns="0" bIns="0">
-            <a:spAutoFit/>
-          </a:bodyPr>
-          <a:lstStyle/>
-          <a:p>
-            <a:pPr algn="l">
-              <a:lnSpc>
-                <a:spcPct val="100000"/>
-              </a:lnSpc>
-              <a:spcAft>
-                <a:spcPts val="600"/>
-              </a:spcAft>
-            </a:pPr>
-            <a:r>
-              <a:rPr sz="1500" b="1">
-                <a:solidFill>
-                  <a:srgbClr val="101010"/>
-                </a:solidFill>
-                <a:latin typeface="Calibri"/>
-              </a:rPr>
-              <a:t>Pillar weights</a:t>
-            </a:r>
-          </a:p>
-        </p:txBody>
-      </p:sp>
-      <p:sp>
-        <p:nvSpPr>
-          <p:cNvPr id="23" name="TextBox 22"/>
-          <p:cNvSpPr txBox="1"/>
-          <p:nvPr/>
-        </p:nvSpPr>
-        <p:spPr>
-          <a:xfrm>
-            <a:off x="8202168" y="3721608"/>
-            <a:ext cx="2926080" cy="320040"/>
-          </a:xfrm>
-          <a:prstGeom prst="rect">
-            <a:avLst/>
-          </a:prstGeom>
-          <a:noFill/>
-        </p:spPr>
-        <p:txBody>
-          <a:bodyPr wrap="square" anchor="t" lIns="0" rIns="0" tIns="0" bIns="0">
-            <a:spAutoFit/>
-          </a:bodyPr>
-          <a:lstStyle/>
-          <a:p>
-            <a:pPr algn="l">
-              <a:lnSpc>
-                <a:spcPct val="100000"/>
-              </a:lnSpc>
-              <a:spcAft>
-                <a:spcPts val="600"/>
-              </a:spcAft>
-            </a:pPr>
-            <a:r>
-              <a:rPr sz="1200" b="0">
-                <a:solidFill>
-                  <a:srgbClr val="6B6A63"/>
-                </a:solidFill>
-                <a:latin typeface="Calibri"/>
-              </a:rPr>
-              <a:t>user slider, five presets</a:t>
-            </a:r>
-          </a:p>
-        </p:txBody>
-      </p:sp>
-      <p:sp>
-        <p:nvSpPr>
-          <p:cNvPr id="24" name="Rectangle 23"/>
-          <p:cNvSpPr/>
-          <p:nvPr/>
-        </p:nvSpPr>
-        <p:spPr>
-          <a:xfrm>
-            <a:off x="777240" y="4480560"/>
-            <a:ext cx="10607040" cy="914400"/>
-          </a:xfrm>
-          <a:prstGeom prst="rect">
-            <a:avLst/>
-          </a:prstGeom>
-          <a:noFill/>
-          <a:ln w="31750">
-            <a:solidFill>
-              <a:srgbClr val="C04A12"/>
-            </a:solidFill>
-          </a:ln>
-          <a:effectLst/>
-        </p:spPr>
-        <p:style>
-          <a:lnRef idx="1">
-            <a:schemeClr val="accent1"/>
-          </a:lnRef>
-          <a:fillRef idx="3">
-            <a:schemeClr val="accent1"/>
-          </a:fillRef>
-          <a:effectRef idx="2">
-            <a:schemeClr val="accent1"/>
-          </a:effectRef>
-          <a:fontRef idx="minor">
-            <a:schemeClr val="lt1"/>
-          </a:fontRef>
-        </p:style>
-        <p:txBody>
-          <a:bodyPr rtlCol="0" anchor="ctr"/>
-          <a:lstStyle/>
-          <a:p>
-            <a:pPr algn="ctr"/>
-          </a:p>
-        </p:txBody>
-      </p:sp>
-      <p:sp>
-        <p:nvSpPr>
-          <p:cNvPr id="25" name="TextBox 24"/>
-          <p:cNvSpPr txBox="1"/>
-          <p:nvPr/>
-        </p:nvSpPr>
-        <p:spPr>
-          <a:xfrm>
-            <a:off x="1051560" y="4663440"/>
-            <a:ext cx="10058400" cy="640080"/>
-          </a:xfrm>
-          <a:prstGeom prst="rect">
-            <a:avLst/>
-          </a:prstGeom>
-          <a:noFill/>
-        </p:spPr>
-        <p:txBody>
-          <a:bodyPr wrap="square" anchor="t" lIns="0" rIns="0" tIns="0" bIns="0">
-            <a:spAutoFit/>
-          </a:bodyPr>
-          <a:lstStyle/>
-          <a:p>
-            <a:pPr algn="l">
-              <a:lnSpc>
-                <a:spcPct val="100000"/>
-              </a:lnSpc>
-              <a:spcAft>
-                <a:spcPts val="600"/>
-              </a:spcAft>
-            </a:pPr>
-            <a:r>
-              <a:rPr sz="1900" b="0">
-                <a:solidFill>
-                  <a:srgbClr val="101010"/>
-                </a:solidFill>
-                <a:latin typeface="Calibri"/>
-              </a:rPr>
-              <a:t>Then the correction that mattered: </a:t>
-            </a:r>
-            <a:r>
-              <a:rPr sz="1900" b="1">
-                <a:solidFill>
-                  <a:srgbClr val="101010"/>
-                </a:solidFill>
-                <a:latin typeface="Calibri"/>
-              </a:rPr>
-              <a:t>“best today” and “improving fastest” are different questions.</a:t>
-            </a:r>
-            <a:r>
-              <a:rPr sz="1900" b="0">
-                <a:solidFill>
-                  <a:srgbClr val="101010"/>
-                </a:solidFill>
-                <a:latin typeface="Calibri"/>
-              </a:rPr>
-              <a:t> We score them separately.</a:t>
-            </a:r>
-          </a:p>
-        </p:txBody>
-      </p:sp>
-      <p:sp>
-        <p:nvSpPr>
-          <p:cNvPr id="26" name="TextBox 25"/>
-          <p:cNvSpPr txBox="1"/>
-          <p:nvPr/>
-        </p:nvSpPr>
-        <p:spPr>
-          <a:xfrm>
-            <a:off x="777240" y="6263640"/>
-            <a:ext cx="10607040" cy="365760"/>
-          </a:xfrm>
-          <a:prstGeom prst="rect">
-            <a:avLst/>
-          </a:prstGeom>
-          <a:noFill/>
-        </p:spPr>
-        <p:txBody>
-          <a:bodyPr wrap="square" anchor="t" lIns="0" rIns="0" tIns="0" bIns="0">
-            <a:spAutoFit/>
-          </a:bodyPr>
-          <a:lstStyle/>
-          <a:p>
-            <a:pPr algn="l">
-              <a:lnSpc>
-                <a:spcPct val="100000"/>
-              </a:lnSpc>
-              <a:spcAft>
-                <a:spcPts val="600"/>
-              </a:spcAft>
-            </a:pPr>
-            <a:r>
-              <a:rPr sz="1100" b="0">
-                <a:solidFill>
-                  <a:srgbClr val="6B6A63"/>
-                </a:solidFill>
-                <a:latin typeface="Calibri"/>
-              </a:rPr>
-              <a:t>Specification curve analysis, Simonsohn, Simmons &amp; Nelson, Nature Human Behaviour 2020.</a:t>
+              <a:t>Now watch what happens when I change one convention.</a:t>
             </a:r>
           </a:p>
         </p:txBody>
@@ -5221,7 +5926,7 @@
             <a:avLst/>
           </a:prstGeom>
           <a:solidFill>
-            <a:srgbClr val="FCFCFB"/>
+            <a:srgbClr val="101010"/>
           </a:solidFill>
           <a:ln>
             <a:noFill/>
@@ -5258,8 +5963,8 @@
         </p:nvSpPr>
         <p:spPr>
           <a:xfrm>
-            <a:off x="777240" y="457200"/>
-            <a:ext cx="10058400" cy="365760"/>
+            <a:off x="777240" y="2011680"/>
+            <a:ext cx="10607040" cy="640080"/>
           </a:xfrm>
           <a:prstGeom prst="rect">
             <a:avLst/>
@@ -5281,13 +5986,13 @@
               </a:spcAft>
             </a:pPr>
             <a:r>
-              <a:rPr sz="1300" b="1">
+              <a:rPr sz="2000" b="1">
                 <a:solidFill>
                   <a:srgbClr val="C04A12"/>
                 </a:solidFill>
                 <a:latin typeface="Calibri"/>
               </a:rPr>
-              <a:t>THE RESULT</a:t>
+              <a:t>LIVE</a:t>
             </a:r>
           </a:p>
         </p:txBody>
@@ -5300,8 +6005,8 @@
         </p:nvSpPr>
         <p:spPr>
           <a:xfrm>
-            <a:off x="777240" y="868680"/>
-            <a:ext cx="5669280" cy="2377440"/>
+            <a:off x="777240" y="2514600"/>
+            <a:ext cx="10607040" cy="1645920"/>
           </a:xfrm>
           <a:prstGeom prst="rect">
             <a:avLst/>
@@ -5319,17 +6024,17 @@
                 <a:spcPct val="100000"/>
               </a:lnSpc>
               <a:spcAft>
-                <a:spcPts val="300"/>
+                <a:spcPts val="200"/>
               </a:spcAft>
             </a:pPr>
             <a:r>
-              <a:rPr sz="9200" b="1">
-                <a:solidFill>
-                  <a:srgbClr val="C04A12"/>
+              <a:rPr sz="5600" b="1">
+                <a:solidFill>
+                  <a:srgbClr val="FFFFFF"/>
                 </a:solidFill>
                 <a:latin typeface="Calibri"/>
               </a:rPr>
-              <a:t>33</a:t>
+              <a:t>Move one switch.</a:t>
             </a:r>
           </a:p>
           <a:p>
@@ -5338,55 +6043,17 @@
                 <a:spcPct val="100000"/>
               </a:lnSpc>
               <a:spcAft>
-                <a:spcPts val="300"/>
+                <a:spcPts val="200"/>
               </a:spcAft>
             </a:pPr>
             <a:r>
-              <a:rPr sz="2200" b="1">
-                <a:solidFill>
-                  <a:srgbClr val="101010"/>
+              <a:rPr sz="5600" b="1">
+                <a:solidFill>
+                  <a:srgbClr val="FFFFFF"/>
                 </a:solidFill>
                 <a:latin typeface="Calibri"/>
               </a:rPr>
-              <a:t>of 153 pairwise comparisons survive</a:t>
-            </a:r>
-          </a:p>
-          <a:p>
-            <a:pPr algn="l">
-              <a:lnSpc>
-                <a:spcPct val="100000"/>
-              </a:lnSpc>
-              <a:spcAft>
-                <a:spcPts val="300"/>
-              </a:spcAft>
-            </a:pPr>
-            <a:r>
-              <a:rPr sz="2200" b="1">
-                <a:solidFill>
-                  <a:srgbClr val="101010"/>
-                </a:solidFill>
-                <a:latin typeface="Calibri"/>
-              </a:rPr>
-              <a:t>every defensible method.</a:t>
-            </a:r>
-          </a:p>
-          <a:p>
-            <a:pPr algn="l">
-              <a:lnSpc>
-                <a:spcPct val="100000"/>
-              </a:lnSpc>
-              <a:spcAft>
-                <a:spcPts val="300"/>
-              </a:spcAft>
-            </a:pPr>
-            <a:r>
-              <a:rPr sz="1700" b="0">
-                <a:solidFill>
-                  <a:srgbClr val="3D3C38"/>
-                </a:solidFill>
-                <a:latin typeface="Calibri"/>
-              </a:rPr>
-              <a:t>A published league table asserts all 153.</a:t>
+              <a:t>Watch the ranking change.</a:t>
             </a:r>
           </a:p>
         </p:txBody>
@@ -5399,111 +6066,8 @@
         </p:nvSpPr>
         <p:spPr>
           <a:xfrm>
-            <a:off x="777240" y="3566160"/>
-            <a:ext cx="5669280" cy="2194560"/>
-          </a:xfrm>
-          <a:prstGeom prst="rect">
-            <a:avLst/>
-          </a:prstGeom>
-          <a:noFill/>
-        </p:spPr>
-        <p:txBody>
-          <a:bodyPr wrap="square" anchor="t" lIns="0" rIns="0" tIns="0" bIns="0">
-            <a:spAutoFit/>
-          </a:bodyPr>
-          <a:lstStyle/>
-          <a:p>
-            <a:pPr algn="l">
-              <a:lnSpc>
-                <a:spcPct val="120000"/>
-              </a:lnSpc>
-              <a:spcAft>
-                <a:spcPts val="1000"/>
-              </a:spcAft>
-            </a:pPr>
-            <a:r>
-              <a:rPr sz="1900" b="0">
-                <a:solidFill>
-                  <a:srgbClr val="3D3C38"/>
-                </a:solidFill>
-                <a:latin typeface="Calibri"/>
-              </a:rPr>
-              <a:t>The median company still moves </a:t>
-            </a:r>
-            <a:r>
-              <a:rPr sz="1900" b="1">
-                <a:solidFill>
-                  <a:srgbClr val="C04A12"/>
-                </a:solidFill>
-                <a:latin typeface="Calibri"/>
-              </a:rPr>
-              <a:t>3 places of 18</a:t>
-            </a:r>
-            <a:r>
-              <a:rPr sz="1900" b="0">
-                <a:solidFill>
-                  <a:srgbClr val="3D3C38"/>
-                </a:solidFill>
-                <a:latin typeface="Calibri"/>
-              </a:rPr>
-              <a:t> on method choice alone, after we hold the question and the peer group fixed.</a:t>
-            </a:r>
-          </a:p>
-          <a:p>
-            <a:pPr algn="l">
-              <a:lnSpc>
-                <a:spcPct val="120000"/>
-              </a:lnSpc>
-              <a:spcAft>
-                <a:spcPts val="1000"/>
-              </a:spcAft>
-            </a:pPr>
-            <a:r>
-              <a:rPr sz="1700" b="0">
-                <a:solidFill>
-                  <a:srgbClr val="6B6A63"/>
-                </a:solidFill>
-                <a:latin typeface="Calibri"/>
-              </a:rPr>
-              <a:t>Two axes decide it: what you ask, and who you ask it against. Neither is a weight.</a:t>
-            </a:r>
-          </a:p>
-        </p:txBody>
-      </p:sp>
-      <p:pic>
-        <p:nvPicPr>
-          <p:cNvPr id="6" name="Picture 5" descr="f3_variance.png"/>
-          <p:cNvPicPr>
-            <a:picLocks noChangeAspect="1"/>
-          </p:cNvPicPr>
-          <p:nvPr/>
-        </p:nvPicPr>
-        <p:blipFill>
-          <a:blip r:embed="rId2"/>
-          <a:stretch>
-            <a:fillRect/>
-          </a:stretch>
-        </p:blipFill>
-        <p:spPr>
-          <a:xfrm>
-            <a:off x="6720840" y="1051560"/>
-            <a:ext cx="4846320" cy="1817370"/>
-          </a:xfrm>
-          <a:prstGeom prst="rect">
-            <a:avLst/>
-          </a:prstGeom>
-        </p:spPr>
-      </p:pic>
-      <p:sp>
-        <p:nvSpPr>
-          <p:cNvPr id="7" name="TextBox 6"/>
-          <p:cNvSpPr txBox="1"/>
-          <p:nvPr/>
-        </p:nvSpPr>
-        <p:spPr>
-          <a:xfrm>
-            <a:off x="6720840" y="4892040"/>
-            <a:ext cx="4846320" cy="365760"/>
+            <a:off x="777240" y="4572000"/>
+            <a:ext cx="10607040" cy="731520"/>
           </a:xfrm>
           <a:prstGeom prst="rect">
             <a:avLst/>
@@ -5525,55 +6089,13 @@
               </a:spcAft>
             </a:pPr>
             <a:r>
-              <a:rPr sz="1200" b="0">
-                <a:solidFill>
-                  <a:srgbClr val="6B6A63"/>
+              <a:rPr sz="2200" b="0">
+                <a:solidFill>
+                  <a:srgbClr val="B8B7B1"/>
                 </a:solidFill>
                 <a:latin typeface="Calibri"/>
               </a:rPr>
-              <a:t>Share of a company's rank variance, by choice</a:t>
-            </a:r>
-          </a:p>
-        </p:txBody>
-      </p:sp>
-      <p:sp>
-        <p:nvSpPr>
-          <p:cNvPr id="8" name="TextBox 7"/>
-          <p:cNvSpPr txBox="1"/>
-          <p:nvPr/>
-        </p:nvSpPr>
-        <p:spPr>
-          <a:xfrm>
-            <a:off x="777240" y="6263640"/>
-            <a:ext cx="10607040" cy="365760"/>
-          </a:xfrm>
-          <a:prstGeom prst="rect">
-            <a:avLst/>
-          </a:prstGeom>
-          <a:noFill/>
-        </p:spPr>
-        <p:txBody>
-          <a:bodyPr wrap="square" anchor="t" lIns="0" rIns="0" tIns="0" bIns="0">
-            <a:spAutoFit/>
-          </a:bodyPr>
-          <a:lstStyle/>
-          <a:p>
-            <a:pPr algn="l">
-              <a:lnSpc>
-                <a:spcPct val="100000"/>
-              </a:lnSpc>
-              <a:spcAft>
-                <a:spcPts val="600"/>
-              </a:spcAft>
-            </a:pPr>
-            <a:r>
-              <a:rPr sz="1100" b="0">
-                <a:solidFill>
-                  <a:srgbClr val="6B6A63"/>
-                </a:solidFill>
-                <a:latin typeface="Calibri"/>
-              </a:rPr>
-              <a:t>Full grid runs in 18 seconds. Every figure regenerates from the committed pipeline.</a:t>
+              <a:t>17,496 specifications, recomputed in the browser, in real time.</a:t>
             </a:r>
           </a:p>
         </p:txBody>
@@ -5611,7 +6133,7 @@
             <a:avLst/>
           </a:prstGeom>
           <a:solidFill>
-            <a:srgbClr val="101010"/>
+            <a:srgbClr val="FCFCFB"/>
           </a:solidFill>
           <a:ln>
             <a:noFill/>
@@ -5648,8 +6170,8 @@
         </p:nvSpPr>
         <p:spPr>
           <a:xfrm>
-            <a:off x="777240" y="2194560"/>
-            <a:ext cx="10607040" cy="1097280"/>
+            <a:off x="777240" y="411480"/>
+            <a:ext cx="10607040" cy="365760"/>
           </a:xfrm>
           <a:prstGeom prst="rect">
             <a:avLst/>
@@ -5671,13 +6193,13 @@
               </a:spcAft>
             </a:pPr>
             <a:r>
-              <a:rPr sz="2200" b="1">
+              <a:rPr sz="1300" b="1">
                 <a:solidFill>
                   <a:srgbClr val="C04A12"/>
                 </a:solidFill>
                 <a:latin typeface="Calibri"/>
               </a:rPr>
-              <a:t>LIVE</a:t>
+              <a:t>BONUS  ·  ONE BILLION DOLLARS UNDER A NET-ZERO COMMITMENT</a:t>
             </a:r>
           </a:p>
         </p:txBody>
@@ -5690,8 +6212,8 @@
         </p:nvSpPr>
         <p:spPr>
           <a:xfrm>
-            <a:off x="777240" y="2651760"/>
-            <a:ext cx="10607040" cy="1463040"/>
+            <a:off x="777240" y="868680"/>
+            <a:ext cx="10607040" cy="685800"/>
           </a:xfrm>
           <a:prstGeom prst="rect">
             <a:avLst/>
@@ -5713,93 +6235,66 @@
               </a:spcAft>
             </a:pPr>
             <a:r>
-              <a:rPr sz="5200" b="1">
-                <a:solidFill>
-                  <a:srgbClr val="FFFFFF"/>
+              <a:rPr sz="3200" b="0">
+                <a:solidFill>
+                  <a:srgbClr val="101010"/>
                 </a:solidFill>
                 <a:latin typeface="Calibri"/>
               </a:rPr>
-              <a:t>Move a slider. Watch the ranking change.</a:t>
-            </a:r>
-          </a:p>
-        </p:txBody>
-      </p:sp>
-      <p:sp>
-        <p:nvSpPr>
-          <p:cNvPr id="5" name="TextBox 4"/>
-          <p:cNvSpPr txBox="1"/>
+              <a:t>Buy the companies the market </a:t>
+            </a:r>
+            <a:r>
+              <a:rPr sz="3200" b="1">
+                <a:solidFill>
+                  <a:srgbClr val="C04A12"/>
+                </a:solidFill>
+                <a:latin typeface="Calibri"/>
+              </a:rPr>
+              <a:t>cannot yet classify.</a:t>
+            </a:r>
+          </a:p>
+        </p:txBody>
+      </p:sp>
+      <p:pic>
+        <p:nvPicPr>
+          <p:cNvPr id="5" name="Picture 4" descr="f4_eligibility.png"/>
+          <p:cNvPicPr>
+            <a:picLocks noChangeAspect="1"/>
+          </p:cNvPicPr>
           <p:nvPr/>
-        </p:nvSpPr>
-        <p:spPr>
-          <a:xfrm>
-            <a:off x="777240" y="4114800"/>
-            <a:ext cx="10607040" cy="914400"/>
+        </p:nvPicPr>
+        <p:blipFill>
+          <a:blip r:embed="rId2"/>
+          <a:stretch>
+            <a:fillRect/>
+          </a:stretch>
+        </p:blipFill>
+        <p:spPr>
+          <a:xfrm>
+            <a:off x="777240" y="1691640"/>
+            <a:ext cx="5349240" cy="2377440"/>
           </a:xfrm>
           <a:prstGeom prst="rect">
             <a:avLst/>
           </a:prstGeom>
-          <a:noFill/>
-        </p:spPr>
-        <p:txBody>
-          <a:bodyPr wrap="square" anchor="t" lIns="0" rIns="0" tIns="0" bIns="0">
-            <a:spAutoFit/>
-          </a:bodyPr>
-          <a:lstStyle/>
-          <a:p>
-            <a:pPr algn="l">
-              <a:lnSpc>
-                <a:spcPct val="100000"/>
-              </a:lnSpc>
-              <a:spcAft>
-                <a:spcPts val="600"/>
-              </a:spcAft>
-            </a:pPr>
-            <a:r>
-              <a:rPr sz="2200" b="0">
-                <a:solidFill>
-                  <a:srgbClr val="B8B7B1"/>
-                </a:solidFill>
-                <a:latin typeface="Calibri"/>
-              </a:rPr>
-              <a:t>17,496 specifications, recomputed in the browser, in real time.</a:t>
-            </a:r>
-          </a:p>
-        </p:txBody>
-      </p:sp>
-    </p:spTree>
-  </p:cSld>
-  <p:clrMapOvr>
-    <a:masterClrMapping/>
-  </p:clrMapOvr>
-</p:sld>
-</file>
-
-<file path=ppt/slides/slide6.xml><?xml version="1.0" encoding="utf-8"?>
-<p:sld xmlns:a="http://schemas.openxmlformats.org/drawingml/2006/main" xmlns:p="http://schemas.openxmlformats.org/presentationml/2006/main" xmlns:r="http://schemas.openxmlformats.org/officeDocument/2006/relationships">
-  <p:cSld>
-    <p:spTree>
-      <p:nvGrpSpPr>
-        <p:cNvPr id="1" name=""/>
-        <p:cNvGrpSpPr/>
-        <p:nvPr/>
-      </p:nvGrpSpPr>
-      <p:grpSpPr/>
-      <p:sp>
-        <p:nvSpPr>
-          <p:cNvPr id="2" name="Rectangle 1"/>
+        </p:spPr>
+      </p:pic>
+      <p:sp>
+        <p:nvSpPr>
+          <p:cNvPr id="6" name="Rectangle 5"/>
           <p:cNvSpPr/>
           <p:nvPr/>
         </p:nvSpPr>
         <p:spPr>
           <a:xfrm>
-            <a:off x="0" y="0"/>
-            <a:ext cx="12191695" cy="6858000"/>
+            <a:off x="6537960" y="1691640"/>
+            <a:ext cx="4846320" cy="3429000"/>
           </a:xfrm>
           <a:prstGeom prst="rect">
             <a:avLst/>
           </a:prstGeom>
           <a:solidFill>
-            <a:srgbClr val="FCFCFB"/>
+            <a:srgbClr val="F2F1ED"/>
           </a:solidFill>
           <a:ln>
             <a:noFill/>
@@ -5830,14 +6325,14 @@
       </p:sp>
       <p:sp>
         <p:nvSpPr>
-          <p:cNvPr id="3" name="TextBox 2"/>
+          <p:cNvPr id="7" name="TextBox 6"/>
           <p:cNvSpPr txBox="1"/>
           <p:nvPr/>
         </p:nvSpPr>
         <p:spPr>
           <a:xfrm>
-            <a:off x="777240" y="457200"/>
-            <a:ext cx="10058400" cy="365760"/>
+            <a:off x="6858000" y="1920240"/>
+            <a:ext cx="4297680" cy="3017520"/>
           </a:xfrm>
           <a:prstGeom prst="rect">
             <a:avLst/>
@@ -5852,157 +6347,133 @@
           <a:p>
             <a:pPr algn="l">
               <a:lnSpc>
-                <a:spcPct val="100000"/>
+                <a:spcPct val="112000"/>
               </a:lnSpc>
               <a:spcAft>
-                <a:spcPts val="600"/>
+                <a:spcPts val="1000"/>
               </a:spcAft>
             </a:pPr>
             <a:r>
-              <a:rPr sz="1300" b="1">
+              <a:rPr sz="4000" b="1">
                 <a:solidFill>
                   <a:srgbClr val="C04A12"/>
                 </a:solidFill>
                 <a:latin typeface="Calibri"/>
               </a:rPr>
-              <a:t>BONUS · $1BN UNDER A NET-ZERO COMMITMENT</a:t>
-            </a:r>
-          </a:p>
-        </p:txBody>
-      </p:sp>
-      <p:sp>
-        <p:nvSpPr>
-          <p:cNvPr id="4" name="TextBox 3"/>
-          <p:cNvSpPr txBox="1"/>
-          <p:nvPr/>
-        </p:nvSpPr>
-        <p:spPr>
-          <a:xfrm>
-            <a:off x="777240" y="868680"/>
-            <a:ext cx="10607040" cy="731520"/>
-          </a:xfrm>
-          <a:prstGeom prst="rect">
-            <a:avLst/>
-          </a:prstGeom>
-          <a:noFill/>
-        </p:spPr>
-        <p:txBody>
-          <a:bodyPr wrap="square" anchor="t" lIns="0" rIns="0" tIns="0" bIns="0">
-            <a:spAutoFit/>
-          </a:bodyPr>
-          <a:lstStyle/>
+              <a:t>15 of 18</a:t>
+            </a:r>
+          </a:p>
           <a:p>
             <a:pPr algn="l">
               <a:lnSpc>
-                <a:spcPct val="100000"/>
+                <a:spcPct val="112000"/>
               </a:lnSpc>
               <a:spcAft>
-                <a:spcPts val="600"/>
+                <a:spcPts val="1000"/>
               </a:spcAft>
             </a:pPr>
             <a:r>
-              <a:rPr sz="3100" b="0">
-                <a:solidFill>
-                  <a:srgbClr val="101010"/>
+              <a:rPr sz="1500" b="0">
+                <a:solidFill>
+                  <a:srgbClr val="3D3C38"/>
                 </a:solidFill>
                 <a:latin typeface="Calibri"/>
               </a:rPr>
-              <a:t>Buy the companies the market </a:t>
-            </a:r>
-            <a:r>
-              <a:rPr sz="3100" b="1">
-                <a:solidFill>
-                  <a:srgbClr val="C04A12"/>
+              <a:t>companies are between 20% and 80% likely to pass a sustainable-fund screen.</a:t>
+            </a:r>
+          </a:p>
+          <a:p>
+            <a:pPr algn="l">
+              <a:lnSpc>
+                <a:spcPct val="112000"/>
+              </a:lnSpc>
+              <a:spcAft>
+                <a:spcPts val="1000"/>
+              </a:spcAft>
+            </a:pPr>
+            <a:r>
+              <a:rPr sz="1500" b="0">
+                <a:solidFill>
+                  <a:srgbClr val="3D3C38"/>
                 </a:solidFill>
                 <a:latin typeface="Calibri"/>
               </a:rPr>
-              <a:t>cannot yet classify.</a:t>
-            </a:r>
-          </a:p>
-        </p:txBody>
-      </p:sp>
-      <p:sp>
-        <p:nvSpPr>
-          <p:cNvPr id="5" name="TextBox 4"/>
-          <p:cNvSpPr txBox="1"/>
-          <p:nvPr/>
-        </p:nvSpPr>
-        <p:spPr>
-          <a:xfrm>
-            <a:off x="777240" y="1554480"/>
-            <a:ext cx="10607040" cy="548640"/>
-          </a:xfrm>
-          <a:prstGeom prst="rect">
-            <a:avLst/>
-          </a:prstGeom>
-          <a:noFill/>
-        </p:spPr>
-        <p:txBody>
-          <a:bodyPr wrap="square" anchor="t" lIns="0" rIns="0" tIns="0" bIns="0">
-            <a:spAutoFit/>
-          </a:bodyPr>
-          <a:lstStyle/>
+              <a:t>There is no threshold to cross. So the trade is not crossing a line, it is the gap between where a company </a:t>
+            </a:r>
+            <a:r>
+              <a:rPr sz="1500" b="1">
+                <a:solidFill>
+                  <a:srgbClr val="101010"/>
+                </a:solidFill>
+                <a:latin typeface="Calibri"/>
+              </a:rPr>
+              <a:t>stands</a:t>
+            </a:r>
+            <a:r>
+              <a:rPr sz="1500" b="0">
+                <a:solidFill>
+                  <a:srgbClr val="3D3C38"/>
+                </a:solidFill>
+                <a:latin typeface="Calibri"/>
+              </a:rPr>
+              <a:t> and where it is </a:t>
+            </a:r>
+            <a:r>
+              <a:rPr sz="1500" b="1">
+                <a:solidFill>
+                  <a:srgbClr val="101010"/>
+                </a:solidFill>
+                <a:latin typeface="Calibri"/>
+              </a:rPr>
+              <a:t>heading</a:t>
+            </a:r>
+            <a:r>
+              <a:rPr sz="1500" b="0">
+                <a:solidFill>
+                  <a:srgbClr val="3D3C38"/>
+                </a:solidFill>
+                <a:latin typeface="Calibri"/>
+              </a:rPr>
+              <a:t>.</a:t>
+            </a:r>
+          </a:p>
           <a:p>
             <a:pPr algn="l">
               <a:lnSpc>
-                <a:spcPct val="100000"/>
+                <a:spcPct val="112000"/>
               </a:lnSpc>
               <a:spcAft>
-                <a:spcPts val="600"/>
+                <a:spcPts val="1000"/>
               </a:spcAft>
             </a:pPr>
             <a:r>
-              <a:rPr sz="1800" b="0">
-                <a:solidFill>
-                  <a:srgbClr val="3D3C38"/>
+              <a:rPr sz="1600" b="1">
+                <a:solidFill>
+                  <a:srgbClr val="C04A12"/>
                 </a:solidFill>
                 <a:latin typeface="Calibri"/>
               </a:rPr>
-              <a:t>We tested the “ESG threshold unlocks capital” thesis on our own data. There is no threshold.</a:t>
-            </a:r>
-          </a:p>
-        </p:txBody>
-      </p:sp>
-      <p:pic>
-        <p:nvPicPr>
-          <p:cNvPr id="6" name="Picture 5" descr="f4_eligibility.png"/>
-          <p:cNvPicPr>
-            <a:picLocks noChangeAspect="1"/>
-          </p:cNvPicPr>
-          <p:nvPr/>
-        </p:nvPicPr>
-        <p:blipFill>
-          <a:blip r:embed="rId2"/>
-          <a:stretch>
-            <a:fillRect/>
-          </a:stretch>
-        </p:blipFill>
-        <p:spPr>
-          <a:xfrm>
-            <a:off x="777240" y="2103120"/>
-            <a:ext cx="5394960" cy="2397760"/>
-          </a:xfrm>
-          <a:prstGeom prst="rect">
-            <a:avLst/>
-          </a:prstGeom>
-        </p:spPr>
-      </p:pic>
-      <p:sp>
-        <p:nvSpPr>
-          <p:cNvPr id="7" name="Rectangle 6"/>
+              <a:t>MPC +0.61    OXY +0.41    PSX +0.28</a:t>
+            </a:r>
+          </a:p>
+        </p:txBody>
+      </p:sp>
+      <p:sp>
+        <p:nvSpPr>
+          <p:cNvPr id="8" name="Rectangle 7"/>
           <p:cNvSpPr/>
           <p:nvPr/>
         </p:nvSpPr>
         <p:spPr>
           <a:xfrm>
-            <a:off x="6537960" y="2103120"/>
-            <a:ext cx="4846320" cy="3200400"/>
+            <a:off x="777240" y="5440680"/>
+            <a:ext cx="10607040" cy="38100"/>
           </a:xfrm>
           <a:prstGeom prst="rect">
             <a:avLst/>
           </a:prstGeom>
           <a:solidFill>
-            <a:srgbClr val="F2F1ED"/>
+            <a:srgbClr val="101010"/>
           </a:solidFill>
           <a:ln>
             <a:noFill/>
@@ -6033,212 +6504,14 @@
       </p:sp>
       <p:sp>
         <p:nvSpPr>
-          <p:cNvPr id="8" name="TextBox 7"/>
+          <p:cNvPr id="9" name="TextBox 8"/>
           <p:cNvSpPr txBox="1"/>
           <p:nvPr/>
         </p:nvSpPr>
         <p:spPr>
           <a:xfrm>
-            <a:off x="6812280" y="2331720"/>
-            <a:ext cx="4389120" cy="2834640"/>
-          </a:xfrm>
-          <a:prstGeom prst="rect">
-            <a:avLst/>
-          </a:prstGeom>
-          <a:noFill/>
-        </p:spPr>
-        <p:txBody>
-          <a:bodyPr wrap="square" anchor="t" lIns="0" rIns="0" tIns="0" bIns="0">
-            <a:spAutoFit/>
-          </a:bodyPr>
-          <a:lstStyle/>
-          <a:p>
-            <a:pPr algn="l">
-              <a:lnSpc>
-                <a:spcPct val="112000"/>
-              </a:lnSpc>
-              <a:spcAft>
-                <a:spcPts val="900"/>
-              </a:spcAft>
-            </a:pPr>
-            <a:r>
-              <a:rPr sz="3400" b="1">
-                <a:solidFill>
-                  <a:srgbClr val="C04A12"/>
-                </a:solidFill>
-                <a:latin typeface="Calibri"/>
-              </a:rPr>
-              <a:t>15 of 18</a:t>
-            </a:r>
-          </a:p>
-          <a:p>
-            <a:pPr algn="l">
-              <a:lnSpc>
-                <a:spcPct val="112000"/>
-              </a:lnSpc>
-              <a:spcAft>
-                <a:spcPts val="900"/>
-              </a:spcAft>
-            </a:pPr>
-            <a:r>
-              <a:rPr sz="1500" b="0">
-                <a:solidFill>
-                  <a:srgbClr val="3D3C38"/>
-                </a:solidFill>
-                <a:latin typeface="Calibri"/>
-              </a:rPr>
-              <a:t>companies sit between 20% and 80% likely to pass a top-half screen.</a:t>
-            </a:r>
-          </a:p>
-          <a:p>
-            <a:pPr algn="l">
-              <a:lnSpc>
-                <a:spcPct val="112000"/>
-              </a:lnSpc>
-              <a:spcAft>
-                <a:spcPts val="900"/>
-              </a:spcAft>
-            </a:pPr>
-            <a:r>
-              <a:rPr sz="1500" b="0">
-                <a:solidFill>
-                  <a:srgbClr val="3D3C38"/>
-                </a:solidFill>
-                <a:latin typeface="Calibri"/>
-              </a:rPr>
-              <a:t>So the tradeable number is not crossing a line. It is the gap between where a company </a:t>
-            </a:r>
-            <a:r>
-              <a:rPr sz="1500" b="1">
-                <a:solidFill>
-                  <a:srgbClr val="101010"/>
-                </a:solidFill>
-                <a:latin typeface="Calibri"/>
-              </a:rPr>
-              <a:t>stands</a:t>
-            </a:r>
-            <a:r>
-              <a:rPr sz="1500" b="0">
-                <a:solidFill>
-                  <a:srgbClr val="3D3C38"/>
-                </a:solidFill>
-                <a:latin typeface="Calibri"/>
-              </a:rPr>
-              <a:t> and where it is </a:t>
-            </a:r>
-            <a:r>
-              <a:rPr sz="1500" b="1">
-                <a:solidFill>
-                  <a:srgbClr val="101010"/>
-                </a:solidFill>
-                <a:latin typeface="Calibri"/>
-              </a:rPr>
-              <a:t>heading</a:t>
-            </a:r>
-            <a:r>
-              <a:rPr sz="1500" b="0">
-                <a:solidFill>
-                  <a:srgbClr val="3D3C38"/>
-                </a:solidFill>
-                <a:latin typeface="Calibri"/>
-              </a:rPr>
-              <a:t>.</a:t>
-            </a:r>
-          </a:p>
-          <a:p>
-            <a:pPr algn="l">
-              <a:lnSpc>
-                <a:spcPct val="112000"/>
-              </a:lnSpc>
-              <a:spcAft>
-                <a:spcPts val="900"/>
-              </a:spcAft>
-            </a:pPr>
-            <a:r>
-              <a:rPr sz="1500" b="1">
-                <a:solidFill>
-                  <a:srgbClr val="C04A12"/>
-                </a:solidFill>
-                <a:latin typeface="Calibri"/>
-              </a:rPr>
-              <a:t>MPC +0.61   OXY +0.41   PSX +0.28</a:t>
-            </a:r>
-          </a:p>
-          <a:p>
-            <a:pPr algn="l">
-              <a:lnSpc>
-                <a:spcPct val="112000"/>
-              </a:lnSpc>
-              <a:spcAft>
-                <a:spcPts val="900"/>
-              </a:spcAft>
-            </a:pPr>
-            <a:r>
-              <a:rPr sz="1400" b="0">
-                <a:solidFill>
-                  <a:srgbClr val="6B6A63"/>
-                </a:solidFill>
-                <a:latin typeface="Calibri"/>
-              </a:rPr>
-              <a:t>Long the gap, short the structurally stuck, exit into eligibility.</a:t>
-            </a:r>
-          </a:p>
-        </p:txBody>
-      </p:sp>
-      <p:sp>
-        <p:nvSpPr>
-          <p:cNvPr id="9" name="Rectangle 8"/>
-          <p:cNvSpPr/>
-          <p:nvPr/>
-        </p:nvSpPr>
-        <p:spPr>
-          <a:xfrm>
-            <a:off x="777240" y="5623560"/>
-            <a:ext cx="10607040" cy="25400"/>
-          </a:xfrm>
-          <a:prstGeom prst="rect">
-            <a:avLst/>
-          </a:prstGeom>
-          <a:solidFill>
-            <a:srgbClr val="101010"/>
-          </a:solidFill>
-          <a:ln>
-            <a:noFill/>
-          </a:ln>
-          <a:effectLst/>
-        </p:spPr>
-        <p:style>
-          <a:lnRef idx="1">
-            <a:schemeClr val="accent1"/>
-          </a:lnRef>
-          <a:fillRef idx="3">
-            <a:schemeClr val="accent1"/>
-          </a:fillRef>
-          <a:effectRef idx="2">
-            <a:schemeClr val="accent1"/>
-          </a:effectRef>
-          <a:fontRef idx="minor">
-            <a:schemeClr val="lt1"/>
-          </a:fontRef>
-        </p:style>
-        <p:txBody>
-          <a:bodyPr rtlCol="0" anchor="ctr"/>
-          <a:lstStyle/>
-          <a:p>
-            <a:pPr algn="ctr"/>
-          </a:p>
-        </p:txBody>
-      </p:sp>
-      <p:sp>
-        <p:nvSpPr>
-          <p:cNvPr id="10" name="TextBox 9"/>
-          <p:cNvSpPr txBox="1"/>
-          <p:nvPr/>
-        </p:nvSpPr>
-        <p:spPr>
-          <a:xfrm>
-            <a:off x="777240" y="5852160"/>
-            <a:ext cx="10607040" cy="548640"/>
+            <a:off x="777240" y="5669280"/>
+            <a:ext cx="10607040" cy="731520"/>
           </a:xfrm>
           <a:prstGeom prst="rect">
             <a:avLst/>
@@ -6260,13 +6533,22 @@
               </a:spcAft>
             </a:pPr>
             <a:r>
-              <a:rPr sz="1900" b="1">
+              <a:rPr sz="2200" b="0">
                 <a:solidFill>
                   <a:srgbClr val="101010"/>
                 </a:solidFill>
                 <a:latin typeface="Calibri"/>
               </a:rPr>
-              <a:t>We deliver the ranking the brief asked for, and the honest error bar around it.</a:t>
+              <a:t>We give you the ranking the brief asked for, </a:t>
+            </a:r>
+            <a:r>
+              <a:rPr sz="2200" b="1">
+                <a:solidFill>
+                  <a:srgbClr val="C04A12"/>
+                </a:solidFill>
+                <a:latin typeface="Calibri"/>
+              </a:rPr>
+              <a:t>and the honest error bar around it.</a:t>
             </a:r>
           </a:p>
         </p:txBody>
@@ -6597,4 +6879,324 @@
   </a:objectDefaults>
   <a:extraClrSchemeLst/>
 </a:theme>
+</file>
+
+<file path=ppt/theme/theme2.xml><?xml version="1.0" encoding="utf-8"?>
+<a:theme xmlns:a="http://schemas.openxmlformats.org/drawingml/2006/main" name="Office Theme">
+  <a:themeElements>
+    <a:clrScheme name="Office">
+      <a:dk1>
+        <a:sysClr val="windowText" lastClr="000000"/>
+      </a:dk1>
+      <a:lt1>
+        <a:sysClr val="window" lastClr="FFFFFF"/>
+      </a:lt1>
+      <a:dk2>
+        <a:srgbClr val="1F497D"/>
+      </a:dk2>
+      <a:lt2>
+        <a:srgbClr val="EEECE1"/>
+      </a:lt2>
+      <a:accent1>
+        <a:srgbClr val="4F81BD"/>
+      </a:accent1>
+      <a:accent2>
+        <a:srgbClr val="C0504D"/>
+      </a:accent2>
+      <a:accent3>
+        <a:srgbClr val="9BBB59"/>
+      </a:accent3>
+      <a:accent4>
+        <a:srgbClr val="8064A2"/>
+      </a:accent4>
+      <a:accent5>
+        <a:srgbClr val="4BACC6"/>
+      </a:accent5>
+      <a:accent6>
+        <a:srgbClr val="F79646"/>
+      </a:accent6>
+      <a:hlink>
+        <a:srgbClr val="0000FF"/>
+      </a:hlink>
+      <a:folHlink>
+        <a:srgbClr val="800080"/>
+      </a:folHlink>
+    </a:clrScheme>
+    <a:fontScheme name="Office">
+      <a:majorFont>
+        <a:latin typeface="Calibri"/>
+        <a:ea typeface=""/>
+        <a:cs typeface=""/>
+        <a:font script="Jpan" typeface="ＭＳ Ｐゴシック"/>
+        <a:font script="Hang" typeface="맑은 고딕"/>
+        <a:font script="Hans" typeface="宋体"/>
+        <a:font script="Hant" typeface="新細明體"/>
+        <a:font script="Arab" typeface="Times New Roman"/>
+        <a:font script="Hebr" typeface="Times New Roman"/>
+        <a:font script="Thai" typeface="Angsana New"/>
+        <a:font script="Ethi" typeface="Nyala"/>
+        <a:font script="Beng" typeface="Vrinda"/>
+        <a:font script="Gujr" typeface="Shruti"/>
+        <a:font script="Khmr" typeface="MoolBoran"/>
+        <a:font script="Knda" typeface="Tunga"/>
+        <a:font script="Guru" typeface="Raavi"/>
+        <a:font script="Cans" typeface="Euphemia"/>
+        <a:font script="Cher" typeface="Plantagenet Cherokee"/>
+        <a:font script="Yiii" typeface="Microsoft Yi Baiti"/>
+        <a:font script="Tibt" typeface="Microsoft Himalaya"/>
+        <a:font script="Thaa" typeface="MV Boli"/>
+        <a:font script="Deva" typeface="Mangal"/>
+        <a:font script="Telu" typeface="Gautami"/>
+        <a:font script="Taml" typeface="Latha"/>
+        <a:font script="Syrc" typeface="Estrangelo Edessa"/>
+        <a:font script="Orya" typeface="Kalinga"/>
+        <a:font script="Mlym" typeface="Kartika"/>
+        <a:font script="Laoo" typeface="DokChampa"/>
+        <a:font script="Sinh" typeface="Iskoola Pota"/>
+        <a:font script="Mong" typeface="Mongolian Baiti"/>
+        <a:font script="Viet" typeface="Times New Roman"/>
+        <a:font script="Uigh" typeface="Microsoft Uighur"/>
+        <a:font script="Geor" typeface="Sylfaen"/>
+      </a:majorFont>
+      <a:minorFont>
+        <a:latin typeface="Calibri"/>
+        <a:ea typeface=""/>
+        <a:cs typeface=""/>
+        <a:font script="Jpan" typeface="ＭＳ Ｐゴシック"/>
+        <a:font script="Hang" typeface="맑은 고딕"/>
+        <a:font script="Hans" typeface="宋体"/>
+        <a:font script="Hant" typeface="新細明體"/>
+        <a:font script="Arab" typeface="Arial"/>
+        <a:font script="Hebr" typeface="Arial"/>
+        <a:font script="Thai" typeface="Cordia New"/>
+        <a:font script="Ethi" typeface="Nyala"/>
+        <a:font script="Beng" typeface="Vrinda"/>
+        <a:font script="Gujr" typeface="Shruti"/>
+        <a:font script="Khmr" typeface="DaunPenh"/>
+        <a:font script="Knda" typeface="Tunga"/>
+        <a:font script="Guru" typeface="Raavi"/>
+        <a:font script="Cans" typeface="Euphemia"/>
+        <a:font script="Cher" typeface="Plantagenet Cherokee"/>
+        <a:font script="Yiii" typeface="Microsoft Yi Baiti"/>
+        <a:font script="Tibt" typeface="Microsoft Himalaya"/>
+        <a:font script="Thaa" typeface="MV Boli"/>
+        <a:font script="Deva" typeface="Mangal"/>
+        <a:font script="Telu" typeface="Gautami"/>
+        <a:font script="Taml" typeface="Latha"/>
+        <a:font script="Syrc" typeface="Estrangelo Edessa"/>
+        <a:font script="Orya" typeface="Kalinga"/>
+        <a:font script="Mlym" typeface="Kartika"/>
+        <a:font script="Laoo" typeface="DokChampa"/>
+        <a:font script="Sinh" typeface="Iskoola Pota"/>
+        <a:font script="Mong" typeface="Mongolian Baiti"/>
+        <a:font script="Viet" typeface="Arial"/>
+        <a:font script="Uigh" typeface="Microsoft Uighur"/>
+        <a:font script="Geor" typeface="Sylfaen"/>
+      </a:minorFont>
+    </a:fontScheme>
+    <a:fmtScheme name="Office">
+      <a:fillStyleLst>
+        <a:solidFill>
+          <a:schemeClr val="phClr"/>
+        </a:solidFill>
+        <a:gradFill rotWithShape="1">
+          <a:gsLst>
+            <a:gs pos="0">
+              <a:schemeClr val="phClr">
+                <a:tint val="50000"/>
+                <a:satMod val="300000"/>
+              </a:schemeClr>
+            </a:gs>
+            <a:gs pos="35000">
+              <a:schemeClr val="phClr">
+                <a:tint val="37000"/>
+                <a:satMod val="300000"/>
+              </a:schemeClr>
+            </a:gs>
+            <a:gs pos="100000">
+              <a:schemeClr val="phClr">
+                <a:tint val="15000"/>
+                <a:satMod val="350000"/>
+              </a:schemeClr>
+            </a:gs>
+          </a:gsLst>
+          <a:lin ang="16200000" scaled="1"/>
+        </a:gradFill>
+        <a:gradFill rotWithShape="1">
+          <a:gsLst>
+            <a:gs pos="0">
+              <a:schemeClr val="phClr">
+                <a:tint val="100000"/>
+                <a:shade val="100000"/>
+                <a:satMod val="130000"/>
+              </a:schemeClr>
+            </a:gs>
+            <a:gs pos="100000">
+              <a:schemeClr val="phClr">
+                <a:tint val="50000"/>
+                <a:shade val="100000"/>
+                <a:satMod val="350000"/>
+              </a:schemeClr>
+            </a:gs>
+          </a:gsLst>
+          <a:lin ang="16200000" scaled="0"/>
+        </a:gradFill>
+      </a:fillStyleLst>
+      <a:lnStyleLst>
+        <a:ln w="9525" cap="flat" cmpd="sng" algn="ctr">
+          <a:solidFill>
+            <a:schemeClr val="phClr">
+              <a:shade val="95000"/>
+              <a:satMod val="105000"/>
+            </a:schemeClr>
+          </a:solidFill>
+          <a:prstDash val="solid"/>
+        </a:ln>
+        <a:ln w="25400" cap="flat" cmpd="sng" algn="ctr">
+          <a:solidFill>
+            <a:schemeClr val="phClr"/>
+          </a:solidFill>
+          <a:prstDash val="solid"/>
+        </a:ln>
+        <a:ln w="38100" cap="flat" cmpd="sng" algn="ctr">
+          <a:solidFill>
+            <a:schemeClr val="phClr"/>
+          </a:solidFill>
+          <a:prstDash val="solid"/>
+        </a:ln>
+      </a:lnStyleLst>
+      <a:effectStyleLst>
+        <a:effectStyle>
+          <a:effectLst>
+            <a:outerShdw blurRad="40000" dist="20000" dir="5400000" rotWithShape="0">
+              <a:srgbClr val="000000">
+                <a:alpha val="38000"/>
+              </a:srgbClr>
+            </a:outerShdw>
+          </a:effectLst>
+        </a:effectStyle>
+        <a:effectStyle>
+          <a:effectLst>
+            <a:outerShdw blurRad="40000" dist="23000" dir="5400000" rotWithShape="0">
+              <a:srgbClr val="000000">
+                <a:alpha val="35000"/>
+              </a:srgbClr>
+            </a:outerShdw>
+          </a:effectLst>
+        </a:effectStyle>
+        <a:effectStyle>
+          <a:effectLst>
+            <a:outerShdw blurRad="40000" dist="23000" dir="5400000" rotWithShape="0">
+              <a:srgbClr val="000000">
+                <a:alpha val="35000"/>
+              </a:srgbClr>
+            </a:outerShdw>
+          </a:effectLst>
+          <a:scene3d>
+            <a:camera prst="orthographicFront">
+              <a:rot lat="0" lon="0" rev="0"/>
+            </a:camera>
+            <a:lightRig rig="threePt" dir="t">
+              <a:rot lat="0" lon="0" rev="1200000"/>
+            </a:lightRig>
+          </a:scene3d>
+          <a:sp3d>
+            <a:bevelT w="63500" h="25400"/>
+          </a:sp3d>
+        </a:effectStyle>
+      </a:effectStyleLst>
+      <a:bgFillStyleLst>
+        <a:solidFill>
+          <a:schemeClr val="phClr"/>
+        </a:solidFill>
+        <a:gradFill rotWithShape="1">
+          <a:gsLst>
+            <a:gs pos="0">
+              <a:schemeClr val="phClr">
+                <a:tint val="40000"/>
+                <a:satMod val="350000"/>
+              </a:schemeClr>
+            </a:gs>
+            <a:gs pos="40000">
+              <a:schemeClr val="phClr">
+                <a:tint val="45000"/>
+                <a:shade val="99000"/>
+                <a:satMod val="350000"/>
+              </a:schemeClr>
+            </a:gs>
+            <a:gs pos="100000">
+              <a:schemeClr val="phClr">
+                <a:shade val="20000"/>
+                <a:satMod val="255000"/>
+              </a:schemeClr>
+            </a:gs>
+          </a:gsLst>
+          <a:path path="circle">
+            <a:fillToRect l="50000" t="-80000" r="50000" b="180000"/>
+          </a:path>
+        </a:gradFill>
+        <a:gradFill rotWithShape="1">
+          <a:gsLst>
+            <a:gs pos="0">
+              <a:schemeClr val="phClr">
+                <a:tint val="80000"/>
+                <a:satMod val="300000"/>
+              </a:schemeClr>
+            </a:gs>
+            <a:gs pos="100000">
+              <a:schemeClr val="phClr">
+                <a:shade val="30000"/>
+                <a:satMod val="200000"/>
+              </a:schemeClr>
+            </a:gs>
+          </a:gsLst>
+          <a:path path="circle">
+            <a:fillToRect l="50000" t="50000" r="50000" b="50000"/>
+          </a:path>
+        </a:gradFill>
+      </a:bgFillStyleLst>
+    </a:fmtScheme>
+  </a:themeElements>
+  <a:objectDefaults>
+    <a:spDef>
+      <a:spPr/>
+      <a:bodyPr/>
+      <a:lstStyle/>
+      <a:style>
+        <a:lnRef idx="1">
+          <a:schemeClr val="accent1"/>
+        </a:lnRef>
+        <a:fillRef idx="3">
+          <a:schemeClr val="accent1"/>
+        </a:fillRef>
+        <a:effectRef idx="2">
+          <a:schemeClr val="accent1"/>
+        </a:effectRef>
+        <a:fontRef idx="minor">
+          <a:schemeClr val="lt1"/>
+        </a:fontRef>
+      </a:style>
+    </a:spDef>
+    <a:lnDef>
+      <a:spPr/>
+      <a:bodyPr/>
+      <a:lstStyle/>
+      <a:style>
+        <a:lnRef idx="2">
+          <a:schemeClr val="accent1"/>
+        </a:lnRef>
+        <a:fillRef idx="0">
+          <a:schemeClr val="accent1"/>
+        </a:fillRef>
+        <a:effectRef idx="1">
+          <a:schemeClr val="accent1"/>
+        </a:effectRef>
+        <a:fontRef idx="minor">
+          <a:schemeClr val="tx1"/>
+        </a:fontRef>
+      </a:style>
+    </a:lnDef>
+  </a:objectDefaults>
+  <a:extraClrSchemeLst/>
+</a:theme>
 </file>
--- a/CONTESTED_pitch.pptx
+++ b/CONTESTED_pitch.pptx
@@ -685,7 +685,7 @@
           </a:p>
           <a:p>
             <a:r>
-              <a:t>publish different methods, every combination.</a:t>
+              <a:t>publish different specifications, every combination.</a:t>
             </a:r>
           </a:p>
           <a:p/>
@@ -5116,7 +5116,7 @@
                 </a:solidFill>
                 <a:latin typeface="Calibri"/>
               </a:rPr>
-              <a:t>All 18 companies, both questions.</a:t>
+              <a:t>All 18 companies, both specification curves.</a:t>
             </a:r>
           </a:p>
           <a:p>

--- a/CONTESTED_pitch.pptx
+++ b/CONTESTED_pitch.pptx
@@ -882,88 +882,144 @@
           <a:lstStyle/>
           <a:p>
             <a:r>
-              <a:t>DEMO  |  68 sec  |  170 spoken words  |  DO EXACTLY THIS</a:t>
+              <a:t>DEMO  |  68 sec  |  FOUR CLICKS, NOTHING ELSE</a:t>
+            </a:r>
+          </a:p>
+          <a:p>
+            <a:r>
+              <a:t>Every number below is verified against the live tool.</a:t>
             </a:r>
           </a:p>
           <a:p/>
           <a:p>
             <a:r>
-              <a:t>1 (8s) "Eighteen companies ranked. Consensus here. This bar is how much of that</a:t>
-            </a:r>
-          </a:p>
-          <a:p>
-            <a:r>
-              <a:t>   rank is a choice."</a:t>
+              <a:t>0 (8s) POINT AT THE TABLE, do not click.</a:t>
+            </a:r>
+          </a:p>
+          <a:p>
+            <a:r>
+              <a:t>   "Eighteen companies ranked. Consensus here. This bar is how much of that</a:t>
+            </a:r>
+          </a:p>
+          <a:p>
+            <a:r>
+              <a:t>   rank is a choice, not a fact."</a:t>
             </a:r>
           </a:p>
           <a:p/>
           <a:p>
             <a:r>
-              <a:t>2 (15s) DRAG THE ENVIRONMENT SLIDER.</a:t>
-            </a:r>
-          </a:p>
-          <a:p>
-            <a:r>
-              <a:t>   "This is what every provider gives you. Pillar weights. It moves the median</a:t>
-            </a:r>
-          </a:p>
-          <a:p>
-            <a:r>
-              <a:t>   company three places. That is the six percent."</a:t>
+              <a:t>1 (15s) DRAG THE ENVIRONMENT SLIDER TO ~70%.</a:t>
+            </a:r>
+          </a:p>
+          <a:p>
+            <a:r>
+              <a:t>   "This is what every provider gives you. Pillar weights. Watch the settled</a:t>
+            </a:r>
+          </a:p>
+          <a:p>
+            <a:r>
+              <a:t>   counter. [pause] It does not move. Still two. That is the six percent, live."</a:t>
+            </a:r>
+          </a:p>
+          <a:p>
+            <a:r>
+              <a:t>   SCREEN: specs stay 17,496, settled stays 2. NOTHING BIG HAPPENS. That is the</a:t>
+            </a:r>
+          </a:p>
+          <a:p>
+            <a:r>
+              <a:t>   point. Do not promise a move here.</a:t>
             </a:r>
           </a:p>
           <a:p/>
           <a:p>
             <a:r>
-              <a:t>3 (20s) PIN Direction to LEVEL, then Evidence bar to STRICT.</a:t>
-            </a:r>
-          </a:p>
-          <a:p>
-            <a:r>
-              <a:t>   "Here is what nobody gives you. This is the question I am asking. And this is</a:t>
-            </a:r>
-          </a:p>
-          <a:p>
-            <a:r>
-              <a:t>   how demanding I am about evidence."</a:t>
+              <a:t>2 (18s) HIT RESET ALL. PIN Direction to LEVEL.</a:t>
+            </a:r>
+          </a:p>
+          <a:p>
+            <a:r>
+              <a:t>   "Now the part nobody gives you. This is the question itself. Cleanest today,</a:t>
+            </a:r>
+          </a:p>
+          <a:p>
+            <a:r>
+              <a:t>   or improving fastest? I pin it to today. Settled goes from two to</a:t>
+            </a:r>
+          </a:p>
+          <a:p>
+            <a:r>
+              <a:t>   thirty-three."</a:t>
+            </a:r>
+          </a:p>
+          <a:p>
+            <a:r>
+              <a:t>   SCREEN: 8,748 specs, settled 33, places 5.0</a:t>
             </a:r>
           </a:p>
           <a:p/>
           <a:p>
             <a:r>
-              <a:t>4 (15s) POINT AT THE SETTLED COUNTER.</a:t>
-            </a:r>
-          </a:p>
-          <a:p>
-            <a:r>
-              <a:t>   "Thirty-three of a hundred and fifty-three comparisons survive every method.</a:t>
-            </a:r>
-          </a:p>
-          <a:p>
-            <a:r>
-              <a:t>   Raise the bar, fifty-six. A league table asserts all hundred and fifty-three."</a:t>
+              <a:t>3 (15s) PIN Evidence bar to STRICT.</a:t>
+            </a:r>
+          </a:p>
+          <a:p>
+            <a:r>
+              <a:t>   "And this is how demanding I am about evidence. Thirty-three to fifty-six.</a:t>
+            </a:r>
+          </a:p>
+          <a:p>
+            <a:r>
+              <a:t>   A published league table asserts all hundred and fifty-three."</a:t>
+            </a:r>
+          </a:p>
+          <a:p>
+            <a:r>
+              <a:t>   SCREEN: 2,916 specs, settled 56, places 3.0</a:t>
             </a:r>
           </a:p>
           <a:p/>
           <a:p>
             <a:r>
-              <a:t>5 (10s) HOVER A POINT ON THE CURVE.</a:t>
-            </a:r>
-          </a:p>
-          <a:p>
-            <a:r>
-              <a:t>   "Every point tells you which nine choices produced it. No black box."</a:t>
+              <a:t>4 (12s) FLIP Direction to CHANGE.</a:t>
+            </a:r>
+          </a:p>
+          <a:p>
+            <a:r>
+              <a:t>   "Same data, same strictness, other question. Fifty-six collapses to nine.</a:t>
+            </a:r>
+          </a:p>
+          <a:p>
+            <a:r>
+              <a:t>   And look at the podium, three completely different companies. That is why we</a:t>
+            </a:r>
+          </a:p>
+          <a:p>
+            <a:r>
+              <a:t>   score the two curves separately."</a:t>
+            </a:r>
+          </a:p>
+          <a:p>
+            <a:r>
+              <a:t>   SCREEN: settled 9, places 6.0, top three flips BKR/EXE/SLB to CTRA/OXY/WMB</a:t>
             </a:r>
           </a:p>
           <a:p/>
           <a:p>
             <a:r>
-              <a:t>IF IT BREAKS: skip to the last slide, say "numbers are in the paper, tool is in</a:t>
-            </a:r>
-          </a:p>
-          <a:p>
-            <a:r>
-              <a:t>the repo". Never debug on stage.</a:t>
+              <a:t>HAND OVER: "Which brings us to the billion dollars."</a:t>
+            </a:r>
+          </a:p>
+          <a:p/>
+          <a:p>
+            <a:r>
+              <a:t>IF IT BREAKS: "The tool is in the repo and every number is in the paper."</a:t>
+            </a:r>
+          </a:p>
+          <a:p>
+            <a:r>
+              <a:t>Go straight to the bonus slide. Never debug on stage.</a:t>
             </a:r>
           </a:p>
         </p:txBody>

--- a/CONTESTED_pitch.pptx
+++ b/CONTESTED_pitch.pptx
@@ -785,7 +785,7 @@
           <a:lstStyle/>
           <a:p>
             <a:r>
-              <a:t>BRIDGE  |  12 sec  |  32 spoken words  |  fast</a:t>
+              <a:t>BRIDGE  |  14 sec  |  38 spoken words  |  then switch to the browser</a:t>
             </a:r>
           </a:p>
           <a:p/>
@@ -796,23 +796,71 @@
           </a:p>
           <a:p>
             <a:r>
-              <a:t>"Why energy? Hardest sector to score. Only three of thirty-seven environmental</a:t>
-            </a:r>
-          </a:p>
-          <a:p>
-            <a:r>
-              <a:t>fields are reported by all eighteen companies. Scope Three is absent entirely,</a:t>
-            </a:r>
-          </a:p>
-          <a:p>
-            <a:r>
-              <a:t>and we say so. Let me show you."</a:t>
+              <a:t>"Why energy? Because raters disagree here more than in any other sector, 0.55</a:t>
+            </a:r>
+          </a:p>
+          <a:p>
+            <a:r>
+              <a:t>against 0.77 in tech. It is also the thinnest data: three of thirty-seven</a:t>
+            </a:r>
+          </a:p>
+          <a:p>
+            <a:r>
+              <a:t>environmental fields are reported by all eighteen companies, and Scope 3 is</a:t>
+            </a:r>
+          </a:p>
+          <a:p>
+            <a:r>
+              <a:t>absent entirely.</a:t>
             </a:r>
           </a:p>
           <a:p/>
           <a:p>
             <a:r>
-              <a:t>THEN SWITCH TO THE BROWSER IMMEDIATELY.</a:t>
+              <a:t>So does our measure behave? It should report more uncertainty where the evidence</a:t>
+            </a:r>
+          </a:p>
+          <a:p>
+            <a:r>
+              <a:t>is thinner, and it does: correlation minus 0.83 across the four pillars.</a:t>
+            </a:r>
+          </a:p>
+          <a:p/>
+          <a:p>
+            <a:r>
+              <a:t>We do not claim this generalises to other sectors. We claim it separates what</a:t>
+            </a:r>
+          </a:p>
+          <a:p>
+            <a:r>
+              <a:t>the data supports from what it does not. Let me show you."</a:t>
+            </a:r>
+          </a:p>
+          <a:p/>
+          <a:p>
+            <a:r>
+              <a:t>CAUTION: the 0.55 figure is Lopez 2020, reached through Nasdaq's 2024 ESG</a:t>
+            </a:r>
+          </a:p>
+          <a:p>
+            <a:r>
+              <a:t>ratings review. If challenged, say it is a secondary citation and we have not</a:t>
+            </a:r>
+          </a:p>
+          <a:p>
+            <a:r>
+              <a:t>read Lopez directly. Do not claim to have.</a:t>
+            </a:r>
+          </a:p>
+          <a:p/>
+          <a:p>
+            <a:r>
+              <a:t>DO NOT say "if it survives here it survives anywhere". We never defined surviving</a:t>
+            </a:r>
+          </a:p>
+          <a:p>
+            <a:r>
+              <a:t>and the four data facts do not show it.</a:t>
             </a:r>
           </a:p>
         </p:txBody>
@@ -25497,8 +25545,8 @@
         </p:nvSpPr>
         <p:spPr>
           <a:xfrm>
-            <a:off x="777240" y="914400"/>
-            <a:ext cx="10607040" cy="731520"/>
+            <a:off x="777240" y="868680"/>
+            <a:ext cx="10607040" cy="685800"/>
           </a:xfrm>
           <a:prstGeom prst="rect">
             <a:avLst/>
@@ -25526,7 +25574,7 @@
                 </a:solidFill>
                 <a:latin typeface="Calibri"/>
               </a:rPr>
-              <a:t>The hardest place to score, so the best place to test.</a:t>
+              <a:t>We picked the sector where the number does the most work.</a:t>
             </a:r>
           </a:p>
         </p:txBody>
@@ -25539,8 +25587,8 @@
         </p:nvSpPr>
         <p:spPr>
           <a:xfrm>
-            <a:off x="777240" y="1965960"/>
-            <a:ext cx="5074920" cy="1143000"/>
+            <a:off x="777240" y="1691640"/>
+            <a:ext cx="5120640" cy="2286000"/>
           </a:xfrm>
           <a:prstGeom prst="rect">
             <a:avLst/>
@@ -25583,36 +25631,36 @@
         </p:nvSpPr>
         <p:spPr>
           <a:xfrm>
-            <a:off x="1051560" y="2130552"/>
-            <a:ext cx="4572000" cy="411480"/>
-          </a:xfrm>
-          <a:prstGeom prst="rect">
-            <a:avLst/>
-          </a:prstGeom>
-          <a:noFill/>
-        </p:spPr>
-        <p:txBody>
-          <a:bodyPr wrap="square" anchor="t" lIns="0" rIns="0" tIns="0" bIns="0">
-            <a:spAutoFit/>
-          </a:bodyPr>
-          <a:lstStyle/>
-          <a:p>
-            <a:pPr algn="l">
-              <a:lnSpc>
-                <a:spcPct val="100000"/>
-              </a:lnSpc>
-              <a:spcAft>
-                <a:spcPts val="600"/>
-              </a:spcAft>
-            </a:pPr>
-            <a:r>
-              <a:rPr sz="2200" b="1">
+            <a:off x="1051560" y="1874519"/>
+            <a:ext cx="4572000" cy="320040"/>
+          </a:xfrm>
+          <a:prstGeom prst="rect">
+            <a:avLst/>
+          </a:prstGeom>
+          <a:noFill/>
+        </p:spPr>
+        <p:txBody>
+          <a:bodyPr wrap="square" anchor="t" lIns="0" rIns="0" tIns="0" bIns="0">
+            <a:spAutoFit/>
+          </a:bodyPr>
+          <a:lstStyle/>
+          <a:p>
+            <a:pPr algn="l">
+              <a:lnSpc>
+                <a:spcPct val="100000"/>
+              </a:lnSpc>
+              <a:spcAft>
+                <a:spcPts val="600"/>
+              </a:spcAft>
+            </a:pPr>
+            <a:r>
+              <a:rPr sz="1300" b="1">
                 <a:solidFill>
                   <a:srgbClr val="C04A12"/>
                 </a:solidFill>
                 <a:latin typeface="Calibri"/>
               </a:rPr>
-              <a:t>Only 3 of 37</a:t>
+              <a:t>Raters disagree here more than anywhere</a:t>
             </a:r>
           </a:p>
         </p:txBody>
@@ -25625,36 +25673,83 @@
         </p:nvSpPr>
         <p:spPr>
           <a:xfrm>
-            <a:off x="1051560" y="2624328"/>
-            <a:ext cx="4572000" cy="411480"/>
-          </a:xfrm>
-          <a:prstGeom prst="rect">
-            <a:avLst/>
-          </a:prstGeom>
-          <a:noFill/>
-        </p:spPr>
-        <p:txBody>
-          <a:bodyPr wrap="square" anchor="t" lIns="0" rIns="0" tIns="0" bIns="0">
-            <a:spAutoFit/>
-          </a:bodyPr>
-          <a:lstStyle/>
-          <a:p>
-            <a:pPr algn="l">
-              <a:lnSpc>
-                <a:spcPct val="100000"/>
-              </a:lnSpc>
-              <a:spcAft>
-                <a:spcPts val="600"/>
-              </a:spcAft>
-            </a:pPr>
-            <a:r>
-              <a:rPr sz="1400" b="0">
+            <a:off x="1051560" y="2286000"/>
+            <a:ext cx="4572000" cy="1554480"/>
+          </a:xfrm>
+          <a:prstGeom prst="rect">
+            <a:avLst/>
+          </a:prstGeom>
+          <a:noFill/>
+        </p:spPr>
+        <p:txBody>
+          <a:bodyPr wrap="square" anchor="t" lIns="0" rIns="0" tIns="0" bIns="0">
+            <a:spAutoFit/>
+          </a:bodyPr>
+          <a:lstStyle/>
+          <a:p>
+            <a:pPr algn="l">
+              <a:lnSpc>
+                <a:spcPct val="112000"/>
+              </a:lnSpc>
+              <a:spcAft>
+                <a:spcPts val="500"/>
+              </a:spcAft>
+            </a:pPr>
+            <a:r>
+              <a:rPr sz="4000" b="1">
+                <a:solidFill>
+                  <a:srgbClr val="C04A12"/>
+                </a:solidFill>
+                <a:latin typeface="Calibri"/>
+              </a:rPr>
+              <a:t>0.55</a:t>
+            </a:r>
+            <a:r>
+              <a:rPr sz="1300" b="0">
                 <a:solidFill>
                   <a:srgbClr val="3D3C38"/>
                 </a:solidFill>
                 <a:latin typeface="Calibri"/>
               </a:rPr>
-              <a:t>environmental fields are reported by all 18 companies</a:t>
+              <a:t>   inter-provider agreement in Energy</a:t>
+            </a:r>
+          </a:p>
+          <a:p>
+            <a:pPr algn="l">
+              <a:lnSpc>
+                <a:spcPct val="112000"/>
+              </a:lnSpc>
+              <a:spcAft>
+                <a:spcPts val="500"/>
+              </a:spcAft>
+            </a:pPr>
+            <a:r>
+              <a:rPr sz="1200" b="0">
+                <a:solidFill>
+                  <a:srgbClr val="3D3C38"/>
+                </a:solidFill>
+                <a:latin typeface="Calibri"/>
+              </a:rPr>
+              <a:t>against 0.77 in Technology. The lowest of any sector.</a:t>
+            </a:r>
+          </a:p>
+          <a:p>
+            <a:pPr algn="l">
+              <a:lnSpc>
+                <a:spcPct val="112000"/>
+              </a:lnSpc>
+              <a:spcAft>
+                <a:spcPts val="500"/>
+              </a:spcAft>
+            </a:pPr>
+            <a:r>
+              <a:rPr sz="1200" b="0">
+                <a:solidFill>
+                  <a:srgbClr val="3D3C38"/>
+                </a:solidFill>
+                <a:latin typeface="Calibri"/>
+              </a:rPr>
+              <a:t>And the thinnest disclosure: only 3 of 37 environmental fields are reported by all 18 companies. Scope 3 is absent entirely.</a:t>
             </a:r>
           </a:p>
         </p:txBody>
@@ -25667,8 +25762,649 @@
         </p:nvSpPr>
         <p:spPr>
           <a:xfrm>
-            <a:off x="6217920" y="1965960"/>
-            <a:ext cx="5074920" cy="1143000"/>
+            <a:off x="6172200" y="1691640"/>
+            <a:ext cx="5212080" cy="2286000"/>
+          </a:xfrm>
+          <a:prstGeom prst="rect">
+            <a:avLst/>
+          </a:prstGeom>
+          <a:noFill/>
+          <a:ln w="25400">
+            <a:solidFill>
+              <a:srgbClr val="C04A12"/>
+            </a:solidFill>
+          </a:ln>
+          <a:effectLst/>
+        </p:spPr>
+        <p:style>
+          <a:lnRef idx="1">
+            <a:schemeClr val="accent1"/>
+          </a:lnRef>
+          <a:fillRef idx="3">
+            <a:schemeClr val="accent1"/>
+          </a:fillRef>
+          <a:effectRef idx="2">
+            <a:schemeClr val="accent1"/>
+          </a:effectRef>
+          <a:fontRef idx="minor">
+            <a:schemeClr val="lt1"/>
+          </a:fontRef>
+        </p:style>
+        <p:txBody>
+          <a:bodyPr rtlCol="0" anchor="ctr"/>
+          <a:lstStyle/>
+          <a:p>
+            <a:pPr algn="ctr"/>
+          </a:p>
+        </p:txBody>
+      </p:sp>
+      <p:sp>
+        <p:nvSpPr>
+          <p:cNvPr id="9" name="TextBox 8"/>
+          <p:cNvSpPr txBox="1"/>
+          <p:nvPr/>
+        </p:nvSpPr>
+        <p:spPr>
+          <a:xfrm>
+            <a:off x="6446520" y="1874519"/>
+            <a:ext cx="4663440" cy="320040"/>
+          </a:xfrm>
+          <a:prstGeom prst="rect">
+            <a:avLst/>
+          </a:prstGeom>
+          <a:noFill/>
+        </p:spPr>
+        <p:txBody>
+          <a:bodyPr wrap="square" anchor="t" lIns="0" rIns="0" tIns="0" bIns="0">
+            <a:spAutoFit/>
+          </a:bodyPr>
+          <a:lstStyle/>
+          <a:p>
+            <a:pPr algn="l">
+              <a:lnSpc>
+                <a:spcPct val="100000"/>
+              </a:lnSpc>
+              <a:spcAft>
+                <a:spcPts val="600"/>
+              </a:spcAft>
+            </a:pPr>
+            <a:r>
+              <a:rPr sz="1300" b="1">
+                <a:solidFill>
+                  <a:srgbClr val="C04A12"/>
+                </a:solidFill>
+                <a:latin typeface="Calibri"/>
+              </a:rPr>
+              <a:t>So does the measure behave?</a:t>
+            </a:r>
+          </a:p>
+        </p:txBody>
+      </p:sp>
+      <p:sp>
+        <p:nvSpPr>
+          <p:cNvPr id="10" name="TextBox 9"/>
+          <p:cNvSpPr txBox="1"/>
+          <p:nvPr/>
+        </p:nvSpPr>
+        <p:spPr>
+          <a:xfrm>
+            <a:off x="6446520" y="2267712"/>
+            <a:ext cx="1554480" cy="274320"/>
+          </a:xfrm>
+          <a:prstGeom prst="rect">
+            <a:avLst/>
+          </a:prstGeom>
+          <a:noFill/>
+        </p:spPr>
+        <p:txBody>
+          <a:bodyPr wrap="square" anchor="t" lIns="0" rIns="0" tIns="0" bIns="0">
+            <a:spAutoFit/>
+          </a:bodyPr>
+          <a:lstStyle/>
+          <a:p>
+            <a:pPr algn="l">
+              <a:lnSpc>
+                <a:spcPct val="100000"/>
+              </a:lnSpc>
+              <a:spcAft>
+                <a:spcPts val="600"/>
+              </a:spcAft>
+            </a:pPr>
+            <a:r>
+              <a:rPr sz="1150" b="0">
+                <a:solidFill>
+                  <a:srgbClr val="101010"/>
+                </a:solidFill>
+                <a:latin typeface="Calibri"/>
+              </a:rPr>
+              <a:t>Financial</a:t>
+            </a:r>
+          </a:p>
+        </p:txBody>
+      </p:sp>
+      <p:sp>
+        <p:nvSpPr>
+          <p:cNvPr id="11" name="TextBox 10"/>
+          <p:cNvSpPr txBox="1"/>
+          <p:nvPr/>
+        </p:nvSpPr>
+        <p:spPr>
+          <a:xfrm>
+            <a:off x="8001000" y="2267712"/>
+            <a:ext cx="914400" cy="274320"/>
+          </a:xfrm>
+          <a:prstGeom prst="rect">
+            <a:avLst/>
+          </a:prstGeom>
+          <a:noFill/>
+        </p:spPr>
+        <p:txBody>
+          <a:bodyPr wrap="square" anchor="t" lIns="0" rIns="0" tIns="0" bIns="0">
+            <a:spAutoFit/>
+          </a:bodyPr>
+          <a:lstStyle/>
+          <a:p>
+            <a:pPr algn="r">
+              <a:lnSpc>
+                <a:spcPct val="100000"/>
+              </a:lnSpc>
+              <a:spcAft>
+                <a:spcPts val="600"/>
+              </a:spcAft>
+            </a:pPr>
+            <a:r>
+              <a:rPr sz="1150" b="0">
+                <a:solidFill>
+                  <a:srgbClr val="3D3C38"/>
+                </a:solidFill>
+                <a:latin typeface="Calibri"/>
+              </a:rPr>
+              <a:t>94%</a:t>
+            </a:r>
+          </a:p>
+        </p:txBody>
+      </p:sp>
+      <p:sp>
+        <p:nvSpPr>
+          <p:cNvPr id="12" name="TextBox 11"/>
+          <p:cNvSpPr txBox="1"/>
+          <p:nvPr/>
+        </p:nvSpPr>
+        <p:spPr>
+          <a:xfrm>
+            <a:off x="9144000" y="2267712"/>
+            <a:ext cx="1371600" cy="274320"/>
+          </a:xfrm>
+          <a:prstGeom prst="rect">
+            <a:avLst/>
+          </a:prstGeom>
+          <a:noFill/>
+        </p:spPr>
+        <p:txBody>
+          <a:bodyPr wrap="square" anchor="t" lIns="0" rIns="0" tIns="0" bIns="0">
+            <a:spAutoFit/>
+          </a:bodyPr>
+          <a:lstStyle/>
+          <a:p>
+            <a:pPr algn="r">
+              <a:lnSpc>
+                <a:spcPct val="100000"/>
+              </a:lnSpc>
+              <a:spcAft>
+                <a:spcPts val="600"/>
+              </a:spcAft>
+            </a:pPr>
+            <a:r>
+              <a:rPr sz="1150" b="1">
+                <a:solidFill>
+                  <a:srgbClr val="C04A12"/>
+                </a:solidFill>
+                <a:latin typeface="Calibri"/>
+              </a:rPr>
+              <a:t>3.0 places</a:t>
+            </a:r>
+          </a:p>
+        </p:txBody>
+      </p:sp>
+      <p:sp>
+        <p:nvSpPr>
+          <p:cNvPr id="13" name="TextBox 12"/>
+          <p:cNvSpPr txBox="1"/>
+          <p:nvPr/>
+        </p:nvSpPr>
+        <p:spPr>
+          <a:xfrm>
+            <a:off x="6446520" y="2596896"/>
+            <a:ext cx="1554480" cy="274320"/>
+          </a:xfrm>
+          <a:prstGeom prst="rect">
+            <a:avLst/>
+          </a:prstGeom>
+          <a:noFill/>
+        </p:spPr>
+        <p:txBody>
+          <a:bodyPr wrap="square" anchor="t" lIns="0" rIns="0" tIns="0" bIns="0">
+            <a:spAutoFit/>
+          </a:bodyPr>
+          <a:lstStyle/>
+          <a:p>
+            <a:pPr algn="l">
+              <a:lnSpc>
+                <a:spcPct val="100000"/>
+              </a:lnSpc>
+              <a:spcAft>
+                <a:spcPts val="600"/>
+              </a:spcAft>
+            </a:pPr>
+            <a:r>
+              <a:rPr sz="1150" b="0">
+                <a:solidFill>
+                  <a:srgbClr val="101010"/>
+                </a:solidFill>
+                <a:latin typeface="Calibri"/>
+              </a:rPr>
+              <a:t>Governance</a:t>
+            </a:r>
+          </a:p>
+        </p:txBody>
+      </p:sp>
+      <p:sp>
+        <p:nvSpPr>
+          <p:cNvPr id="14" name="TextBox 13"/>
+          <p:cNvSpPr txBox="1"/>
+          <p:nvPr/>
+        </p:nvSpPr>
+        <p:spPr>
+          <a:xfrm>
+            <a:off x="8001000" y="2596896"/>
+            <a:ext cx="914400" cy="274320"/>
+          </a:xfrm>
+          <a:prstGeom prst="rect">
+            <a:avLst/>
+          </a:prstGeom>
+          <a:noFill/>
+        </p:spPr>
+        <p:txBody>
+          <a:bodyPr wrap="square" anchor="t" lIns="0" rIns="0" tIns="0" bIns="0">
+            <a:spAutoFit/>
+          </a:bodyPr>
+          <a:lstStyle/>
+          <a:p>
+            <a:pPr algn="r">
+              <a:lnSpc>
+                <a:spcPct val="100000"/>
+              </a:lnSpc>
+              <a:spcAft>
+                <a:spcPts val="600"/>
+              </a:spcAft>
+            </a:pPr>
+            <a:r>
+              <a:rPr sz="1150" b="0">
+                <a:solidFill>
+                  <a:srgbClr val="3D3C38"/>
+                </a:solidFill>
+                <a:latin typeface="Calibri"/>
+              </a:rPr>
+              <a:t>97%</a:t>
+            </a:r>
+          </a:p>
+        </p:txBody>
+      </p:sp>
+      <p:sp>
+        <p:nvSpPr>
+          <p:cNvPr id="15" name="TextBox 14"/>
+          <p:cNvSpPr txBox="1"/>
+          <p:nvPr/>
+        </p:nvSpPr>
+        <p:spPr>
+          <a:xfrm>
+            <a:off x="9144000" y="2596896"/>
+            <a:ext cx="1371600" cy="274320"/>
+          </a:xfrm>
+          <a:prstGeom prst="rect">
+            <a:avLst/>
+          </a:prstGeom>
+          <a:noFill/>
+        </p:spPr>
+        <p:txBody>
+          <a:bodyPr wrap="square" anchor="t" lIns="0" rIns="0" tIns="0" bIns="0">
+            <a:spAutoFit/>
+          </a:bodyPr>
+          <a:lstStyle/>
+          <a:p>
+            <a:pPr algn="r">
+              <a:lnSpc>
+                <a:spcPct val="100000"/>
+              </a:lnSpc>
+              <a:spcAft>
+                <a:spcPts val="600"/>
+              </a:spcAft>
+            </a:pPr>
+            <a:r>
+              <a:rPr sz="1150" b="1">
+                <a:solidFill>
+                  <a:srgbClr val="C04A12"/>
+                </a:solidFill>
+                <a:latin typeface="Calibri"/>
+              </a:rPr>
+              <a:t>4.0 places</a:t>
+            </a:r>
+          </a:p>
+        </p:txBody>
+      </p:sp>
+      <p:sp>
+        <p:nvSpPr>
+          <p:cNvPr id="16" name="TextBox 15"/>
+          <p:cNvSpPr txBox="1"/>
+          <p:nvPr/>
+        </p:nvSpPr>
+        <p:spPr>
+          <a:xfrm>
+            <a:off x="6446520" y="2926080"/>
+            <a:ext cx="1554480" cy="274320"/>
+          </a:xfrm>
+          <a:prstGeom prst="rect">
+            <a:avLst/>
+          </a:prstGeom>
+          <a:noFill/>
+        </p:spPr>
+        <p:txBody>
+          <a:bodyPr wrap="square" anchor="t" lIns="0" rIns="0" tIns="0" bIns="0">
+            <a:spAutoFit/>
+          </a:bodyPr>
+          <a:lstStyle/>
+          <a:p>
+            <a:pPr algn="l">
+              <a:lnSpc>
+                <a:spcPct val="100000"/>
+              </a:lnSpc>
+              <a:spcAft>
+                <a:spcPts val="600"/>
+              </a:spcAft>
+            </a:pPr>
+            <a:r>
+              <a:rPr sz="1150" b="0">
+                <a:solidFill>
+                  <a:srgbClr val="101010"/>
+                </a:solidFill>
+                <a:latin typeface="Calibri"/>
+              </a:rPr>
+              <a:t>Environment</a:t>
+            </a:r>
+          </a:p>
+        </p:txBody>
+      </p:sp>
+      <p:sp>
+        <p:nvSpPr>
+          <p:cNvPr id="17" name="TextBox 16"/>
+          <p:cNvSpPr txBox="1"/>
+          <p:nvPr/>
+        </p:nvSpPr>
+        <p:spPr>
+          <a:xfrm>
+            <a:off x="8001000" y="2926080"/>
+            <a:ext cx="914400" cy="274320"/>
+          </a:xfrm>
+          <a:prstGeom prst="rect">
+            <a:avLst/>
+          </a:prstGeom>
+          <a:noFill/>
+        </p:spPr>
+        <p:txBody>
+          <a:bodyPr wrap="square" anchor="t" lIns="0" rIns="0" tIns="0" bIns="0">
+            <a:spAutoFit/>
+          </a:bodyPr>
+          <a:lstStyle/>
+          <a:p>
+            <a:pPr algn="r">
+              <a:lnSpc>
+                <a:spcPct val="100000"/>
+              </a:lnSpc>
+              <a:spcAft>
+                <a:spcPts val="600"/>
+              </a:spcAft>
+            </a:pPr>
+            <a:r>
+              <a:rPr sz="1150" b="0">
+                <a:solidFill>
+                  <a:srgbClr val="3D3C38"/>
+                </a:solidFill>
+                <a:latin typeface="Calibri"/>
+              </a:rPr>
+              <a:t>61%</a:t>
+            </a:r>
+          </a:p>
+        </p:txBody>
+      </p:sp>
+      <p:sp>
+        <p:nvSpPr>
+          <p:cNvPr id="18" name="TextBox 17"/>
+          <p:cNvSpPr txBox="1"/>
+          <p:nvPr/>
+        </p:nvSpPr>
+        <p:spPr>
+          <a:xfrm>
+            <a:off x="9144000" y="2926080"/>
+            <a:ext cx="1371600" cy="274320"/>
+          </a:xfrm>
+          <a:prstGeom prst="rect">
+            <a:avLst/>
+          </a:prstGeom>
+          <a:noFill/>
+        </p:spPr>
+        <p:txBody>
+          <a:bodyPr wrap="square" anchor="t" lIns="0" rIns="0" tIns="0" bIns="0">
+            <a:spAutoFit/>
+          </a:bodyPr>
+          <a:lstStyle/>
+          <a:p>
+            <a:pPr algn="r">
+              <a:lnSpc>
+                <a:spcPct val="100000"/>
+              </a:lnSpc>
+              <a:spcAft>
+                <a:spcPts val="600"/>
+              </a:spcAft>
+            </a:pPr>
+            <a:r>
+              <a:rPr sz="1150" b="1">
+                <a:solidFill>
+                  <a:srgbClr val="C04A12"/>
+                </a:solidFill>
+                <a:latin typeface="Calibri"/>
+              </a:rPr>
+              <a:t>5.0 places</a:t>
+            </a:r>
+          </a:p>
+        </p:txBody>
+      </p:sp>
+      <p:sp>
+        <p:nvSpPr>
+          <p:cNvPr id="19" name="TextBox 18"/>
+          <p:cNvSpPr txBox="1"/>
+          <p:nvPr/>
+        </p:nvSpPr>
+        <p:spPr>
+          <a:xfrm>
+            <a:off x="6446520" y="3255264"/>
+            <a:ext cx="1554480" cy="274320"/>
+          </a:xfrm>
+          <a:prstGeom prst="rect">
+            <a:avLst/>
+          </a:prstGeom>
+          <a:noFill/>
+        </p:spPr>
+        <p:txBody>
+          <a:bodyPr wrap="square" anchor="t" lIns="0" rIns="0" tIns="0" bIns="0">
+            <a:spAutoFit/>
+          </a:bodyPr>
+          <a:lstStyle/>
+          <a:p>
+            <a:pPr algn="l">
+              <a:lnSpc>
+                <a:spcPct val="100000"/>
+              </a:lnSpc>
+              <a:spcAft>
+                <a:spcPts val="600"/>
+              </a:spcAft>
+            </a:pPr>
+            <a:r>
+              <a:rPr sz="1150" b="0">
+                <a:solidFill>
+                  <a:srgbClr val="101010"/>
+                </a:solidFill>
+                <a:latin typeface="Calibri"/>
+              </a:rPr>
+              <a:t>Social</a:t>
+            </a:r>
+          </a:p>
+        </p:txBody>
+      </p:sp>
+      <p:sp>
+        <p:nvSpPr>
+          <p:cNvPr id="20" name="TextBox 19"/>
+          <p:cNvSpPr txBox="1"/>
+          <p:nvPr/>
+        </p:nvSpPr>
+        <p:spPr>
+          <a:xfrm>
+            <a:off x="8001000" y="3255264"/>
+            <a:ext cx="914400" cy="274320"/>
+          </a:xfrm>
+          <a:prstGeom prst="rect">
+            <a:avLst/>
+          </a:prstGeom>
+          <a:noFill/>
+        </p:spPr>
+        <p:txBody>
+          <a:bodyPr wrap="square" anchor="t" lIns="0" rIns="0" tIns="0" bIns="0">
+            <a:spAutoFit/>
+          </a:bodyPr>
+          <a:lstStyle/>
+          <a:p>
+            <a:pPr algn="r">
+              <a:lnSpc>
+                <a:spcPct val="100000"/>
+              </a:lnSpc>
+              <a:spcAft>
+                <a:spcPts val="600"/>
+              </a:spcAft>
+            </a:pPr>
+            <a:r>
+              <a:rPr sz="1150" b="0">
+                <a:solidFill>
+                  <a:srgbClr val="3D3C38"/>
+                </a:solidFill>
+                <a:latin typeface="Calibri"/>
+              </a:rPr>
+              <a:t>66%</a:t>
+            </a:r>
+          </a:p>
+        </p:txBody>
+      </p:sp>
+      <p:sp>
+        <p:nvSpPr>
+          <p:cNvPr id="21" name="TextBox 20"/>
+          <p:cNvSpPr txBox="1"/>
+          <p:nvPr/>
+        </p:nvSpPr>
+        <p:spPr>
+          <a:xfrm>
+            <a:off x="9144000" y="3255264"/>
+            <a:ext cx="1371600" cy="274320"/>
+          </a:xfrm>
+          <a:prstGeom prst="rect">
+            <a:avLst/>
+          </a:prstGeom>
+          <a:noFill/>
+        </p:spPr>
+        <p:txBody>
+          <a:bodyPr wrap="square" anchor="t" lIns="0" rIns="0" tIns="0" bIns="0">
+            <a:spAutoFit/>
+          </a:bodyPr>
+          <a:lstStyle/>
+          <a:p>
+            <a:pPr algn="r">
+              <a:lnSpc>
+                <a:spcPct val="100000"/>
+              </a:lnSpc>
+              <a:spcAft>
+                <a:spcPts val="600"/>
+              </a:spcAft>
+            </a:pPr>
+            <a:r>
+              <a:rPr sz="1150" b="1">
+                <a:solidFill>
+                  <a:srgbClr val="C04A12"/>
+                </a:solidFill>
+                <a:latin typeface="Calibri"/>
+              </a:rPr>
+              <a:t>6.0 places</a:t>
+            </a:r>
+          </a:p>
+        </p:txBody>
+      </p:sp>
+      <p:sp>
+        <p:nvSpPr>
+          <p:cNvPr id="22" name="TextBox 21"/>
+          <p:cNvSpPr txBox="1"/>
+          <p:nvPr/>
+        </p:nvSpPr>
+        <p:spPr>
+          <a:xfrm>
+            <a:off x="6446520" y="3611880"/>
+            <a:ext cx="4663440" cy="320040"/>
+          </a:xfrm>
+          <a:prstGeom prst="rect">
+            <a:avLst/>
+          </a:prstGeom>
+          <a:noFill/>
+        </p:spPr>
+        <p:txBody>
+          <a:bodyPr wrap="square" anchor="t" lIns="0" rIns="0" tIns="0" bIns="0">
+            <a:spAutoFit/>
+          </a:bodyPr>
+          <a:lstStyle/>
+          <a:p>
+            <a:pPr algn="l">
+              <a:lnSpc>
+                <a:spcPct val="100000"/>
+              </a:lnSpc>
+              <a:spcAft>
+                <a:spcPts val="600"/>
+              </a:spcAft>
+            </a:pPr>
+            <a:r>
+              <a:rPr sz="1200" b="0">
+                <a:solidFill>
+                  <a:srgbClr val="3D3C38"/>
+                </a:solidFill>
+                <a:latin typeface="Calibri"/>
+              </a:rPr>
+              <a:t>Contestation tracks coverage: </a:t>
+            </a:r>
+            <a:r>
+              <a:rPr sz="1200" b="1">
+                <a:solidFill>
+                  <a:srgbClr val="101010"/>
+                </a:solidFill>
+                <a:latin typeface="Calibri"/>
+              </a:rPr>
+              <a:t>correlation −0.83.</a:t>
+            </a:r>
+          </a:p>
+        </p:txBody>
+      </p:sp>
+      <p:sp>
+        <p:nvSpPr>
+          <p:cNvPr id="23" name="Rectangle 22"/>
+          <p:cNvSpPr/>
+          <p:nvPr/>
+        </p:nvSpPr>
+        <p:spPr>
+          <a:xfrm>
+            <a:off x="777240" y="4206240"/>
+            <a:ext cx="10607040" cy="1737360"/>
           </a:xfrm>
           <a:prstGeom prst="rect">
             <a:avLst/>
@@ -25705,74 +26441,51 @@
       </p:sp>
       <p:sp>
         <p:nvSpPr>
-          <p:cNvPr id="9" name="TextBox 8"/>
-          <p:cNvSpPr txBox="1"/>
-          <p:nvPr/>
-        </p:nvSpPr>
-        <p:spPr>
-          <a:xfrm>
-            <a:off x="6492240" y="2130552"/>
-            <a:ext cx="4572000" cy="411480"/>
-          </a:xfrm>
-          <a:prstGeom prst="rect">
-            <a:avLst/>
-          </a:prstGeom>
-          <a:noFill/>
-        </p:spPr>
-        <p:txBody>
-          <a:bodyPr wrap="square" anchor="t" lIns="0" rIns="0" tIns="0" bIns="0">
-            <a:spAutoFit/>
-          </a:bodyPr>
-          <a:lstStyle/>
-          <a:p>
-            <a:pPr algn="l">
-              <a:lnSpc>
-                <a:spcPct val="100000"/>
-              </a:lnSpc>
-              <a:spcAft>
-                <a:spcPts val="600"/>
-              </a:spcAft>
-            </a:pPr>
-            <a:r>
-              <a:rPr sz="2200" b="1">
-                <a:solidFill>
-                  <a:srgbClr val="C04A12"/>
-                </a:solidFill>
-                <a:latin typeface="Calibri"/>
-              </a:rPr>
-              <a:t>Scope 3 absent</a:t>
-            </a:r>
-          </a:p>
-        </p:txBody>
-      </p:sp>
-      <p:sp>
-        <p:nvSpPr>
-          <p:cNvPr id="10" name="TextBox 9"/>
-          <p:cNvSpPr txBox="1"/>
-          <p:nvPr/>
-        </p:nvSpPr>
-        <p:spPr>
-          <a:xfrm>
-            <a:off x="6492240" y="2624328"/>
-            <a:ext cx="4572000" cy="411480"/>
-          </a:xfrm>
-          <a:prstGeom prst="rect">
-            <a:avLst/>
-          </a:prstGeom>
-          <a:noFill/>
-        </p:spPr>
-        <p:txBody>
-          <a:bodyPr wrap="square" anchor="t" lIns="0" rIns="0" tIns="0" bIns="0">
-            <a:spAutoFit/>
-          </a:bodyPr>
-          <a:lstStyle/>
-          <a:p>
-            <a:pPr algn="l">
-              <a:lnSpc>
-                <a:spcPct val="100000"/>
-              </a:lnSpc>
-              <a:spcAft>
-                <a:spcPts val="600"/>
+          <p:cNvPr id="24" name="TextBox 23"/>
+          <p:cNvSpPr txBox="1"/>
+          <p:nvPr/>
+        </p:nvSpPr>
+        <p:spPr>
+          <a:xfrm>
+            <a:off x="1097280" y="4434840"/>
+            <a:ext cx="10058400" cy="1371600"/>
+          </a:xfrm>
+          <a:prstGeom prst="rect">
+            <a:avLst/>
+          </a:prstGeom>
+          <a:noFill/>
+        </p:spPr>
+        <p:txBody>
+          <a:bodyPr wrap="square" anchor="t" lIns="0" rIns="0" tIns="0" bIns="0">
+            <a:spAutoFit/>
+          </a:bodyPr>
+          <a:lstStyle/>
+          <a:p>
+            <a:pPr algn="l">
+              <a:lnSpc>
+                <a:spcPct val="115000"/>
+              </a:lnSpc>
+              <a:spcAft>
+                <a:spcPts val="500"/>
+              </a:spcAft>
+            </a:pPr>
+            <a:r>
+              <a:rPr sz="1500" b="1">
+                <a:solidFill>
+                  <a:srgbClr val="101010"/>
+                </a:solidFill>
+                <a:latin typeface="Calibri"/>
+              </a:rPr>
+              <a:t>What we can claim, and what we cannot.</a:t>
+            </a:r>
+          </a:p>
+          <a:p>
+            <a:pPr algn="l">
+              <a:lnSpc>
+                <a:spcPct val="115000"/>
+              </a:lnSpc>
+              <a:spcAft>
+                <a:spcPts val="500"/>
               </a:spcAft>
             </a:pPr>
             <a:r>
@@ -25782,127 +26495,17 @@
                 </a:solidFill>
                 <a:latin typeface="Calibri"/>
               </a:rPr>
-              <a:t>from every field Bloomberg delivers for these peer groups</a:t>
-            </a:r>
-          </a:p>
-        </p:txBody>
-      </p:sp>
-      <p:sp>
-        <p:nvSpPr>
-          <p:cNvPr id="11" name="Rectangle 10"/>
-          <p:cNvSpPr/>
-          <p:nvPr/>
-        </p:nvSpPr>
-        <p:spPr>
-          <a:xfrm>
-            <a:off x="777240" y="3337560"/>
-            <a:ext cx="5074920" cy="1143000"/>
-          </a:xfrm>
-          <a:prstGeom prst="rect">
-            <a:avLst/>
-          </a:prstGeom>
-          <a:solidFill>
-            <a:srgbClr val="F2F1ED"/>
-          </a:solidFill>
-          <a:ln>
-            <a:noFill/>
-          </a:ln>
-          <a:effectLst/>
-        </p:spPr>
-        <p:style>
-          <a:lnRef idx="1">
-            <a:schemeClr val="accent1"/>
-          </a:lnRef>
-          <a:fillRef idx="3">
-            <a:schemeClr val="accent1"/>
-          </a:fillRef>
-          <a:effectRef idx="2">
-            <a:schemeClr val="accent1"/>
-          </a:effectRef>
-          <a:fontRef idx="minor">
-            <a:schemeClr val="lt1"/>
-          </a:fontRef>
-        </p:style>
-        <p:txBody>
-          <a:bodyPr rtlCol="0" anchor="ctr"/>
-          <a:lstStyle/>
-          <a:p>
-            <a:pPr algn="ctr"/>
-          </a:p>
-        </p:txBody>
-      </p:sp>
-      <p:sp>
-        <p:nvSpPr>
-          <p:cNvPr id="12" name="TextBox 11"/>
-          <p:cNvSpPr txBox="1"/>
-          <p:nvPr/>
-        </p:nvSpPr>
-        <p:spPr>
-          <a:xfrm>
-            <a:off x="1051560" y="3502152"/>
-            <a:ext cx="4572000" cy="411480"/>
-          </a:xfrm>
-          <a:prstGeom prst="rect">
-            <a:avLst/>
-          </a:prstGeom>
-          <a:noFill/>
-        </p:spPr>
-        <p:txBody>
-          <a:bodyPr wrap="square" anchor="t" lIns="0" rIns="0" tIns="0" bIns="0">
-            <a:spAutoFit/>
-          </a:bodyPr>
-          <a:lstStyle/>
-          <a:p>
-            <a:pPr algn="l">
-              <a:lnSpc>
-                <a:spcPct val="100000"/>
-              </a:lnSpc>
-              <a:spcAft>
-                <a:spcPts val="600"/>
-              </a:spcAft>
-            </a:pPr>
-            <a:r>
-              <a:rPr sz="2200" b="1">
-                <a:solidFill>
-                  <a:srgbClr val="C04A12"/>
-                </a:solidFill>
-                <a:latin typeface="Calibri"/>
-              </a:rPr>
-              <a:t>FY2025 is 36%</a:t>
-            </a:r>
-          </a:p>
-        </p:txBody>
-      </p:sp>
-      <p:sp>
-        <p:nvSpPr>
-          <p:cNvPr id="13" name="TextBox 12"/>
-          <p:cNvSpPr txBox="1"/>
-          <p:nvPr/>
-        </p:nvSpPr>
-        <p:spPr>
-          <a:xfrm>
-            <a:off x="1051560" y="3995928"/>
-            <a:ext cx="4572000" cy="411480"/>
-          </a:xfrm>
-          <a:prstGeom prst="rect">
-            <a:avLst/>
-          </a:prstGeom>
-          <a:noFill/>
-        </p:spPr>
-        <p:txBody>
-          <a:bodyPr wrap="square" anchor="t" lIns="0" rIns="0" tIns="0" bIns="0">
-            <a:spAutoFit/>
-          </a:bodyPr>
-          <a:lstStyle/>
-          <a:p>
-            <a:pPr algn="l">
-              <a:lnSpc>
-                <a:spcPct val="100000"/>
-              </a:lnSpc>
-              <a:spcAft>
-                <a:spcPts val="600"/>
-              </a:spcAft>
-            </a:pPr>
+              <a:t>We do </a:t>
+            </a:r>
+            <a:r>
+              <a:rPr sz="1400" b="1">
+                <a:solidFill>
+                  <a:srgbClr val="101010"/>
+                </a:solidFill>
+                <a:latin typeface="Calibri"/>
+              </a:rPr>
+              <a:t>not</a:t>
+            </a:r>
             <a:r>
               <a:rPr sz="1400" b="0">
                 <a:solidFill>
@@ -25910,125 +26513,16 @@
                 </a:solidFill>
                 <a:latin typeface="Calibri"/>
               </a:rPr>
-              <a:t>complete for environmental data. The lag is structural</a:t>
-            </a:r>
-          </a:p>
-        </p:txBody>
-      </p:sp>
-      <p:sp>
-        <p:nvSpPr>
-          <p:cNvPr id="14" name="Rectangle 13"/>
-          <p:cNvSpPr/>
-          <p:nvPr/>
-        </p:nvSpPr>
-        <p:spPr>
-          <a:xfrm>
-            <a:off x="6217920" y="3337560"/>
-            <a:ext cx="5074920" cy="1143000"/>
-          </a:xfrm>
-          <a:prstGeom prst="rect">
-            <a:avLst/>
-          </a:prstGeom>
-          <a:solidFill>
-            <a:srgbClr val="F2F1ED"/>
-          </a:solidFill>
-          <a:ln>
-            <a:noFill/>
-          </a:ln>
-          <a:effectLst/>
-        </p:spPr>
-        <p:style>
-          <a:lnRef idx="1">
-            <a:schemeClr val="accent1"/>
-          </a:lnRef>
-          <a:fillRef idx="3">
-            <a:schemeClr val="accent1"/>
-          </a:fillRef>
-          <a:effectRef idx="2">
-            <a:schemeClr val="accent1"/>
-          </a:effectRef>
-          <a:fontRef idx="minor">
-            <a:schemeClr val="lt1"/>
-          </a:fontRef>
-        </p:style>
-        <p:txBody>
-          <a:bodyPr rtlCol="0" anchor="ctr"/>
-          <a:lstStyle/>
-          <a:p>
-            <a:pPr algn="ctr"/>
-          </a:p>
-        </p:txBody>
-      </p:sp>
-      <p:sp>
-        <p:nvSpPr>
-          <p:cNvPr id="15" name="TextBox 14"/>
-          <p:cNvSpPr txBox="1"/>
-          <p:nvPr/>
-        </p:nvSpPr>
-        <p:spPr>
-          <a:xfrm>
-            <a:off x="6492240" y="3502152"/>
-            <a:ext cx="4572000" cy="411480"/>
-          </a:xfrm>
-          <a:prstGeom prst="rect">
-            <a:avLst/>
-          </a:prstGeom>
-          <a:noFill/>
-        </p:spPr>
-        <p:txBody>
-          <a:bodyPr wrap="square" anchor="t" lIns="0" rIns="0" tIns="0" bIns="0">
-            <a:spAutoFit/>
-          </a:bodyPr>
-          <a:lstStyle/>
-          <a:p>
-            <a:pPr algn="l">
-              <a:lnSpc>
-                <a:spcPct val="100000"/>
-              </a:lnSpc>
-              <a:spcAft>
-                <a:spcPts val="600"/>
-              </a:spcAft>
-            </a:pPr>
-            <a:r>
-              <a:rPr sz="2200" b="1">
-                <a:solidFill>
-                  <a:srgbClr val="C04A12"/>
-                </a:solidFill>
-                <a:latin typeface="Calibri"/>
-              </a:rPr>
-              <a:t>18 seconds</a:t>
-            </a:r>
-          </a:p>
-        </p:txBody>
-      </p:sp>
-      <p:sp>
-        <p:nvSpPr>
-          <p:cNvPr id="16" name="TextBox 15"/>
-          <p:cNvSpPr txBox="1"/>
-          <p:nvPr/>
-        </p:nvSpPr>
-        <p:spPr>
-          <a:xfrm>
-            <a:off x="6492240" y="3995928"/>
-            <a:ext cx="4572000" cy="411480"/>
-          </a:xfrm>
-          <a:prstGeom prst="rect">
-            <a:avLst/>
-          </a:prstGeom>
-          <a:noFill/>
-        </p:spPr>
-        <p:txBody>
-          <a:bodyPr wrap="square" anchor="t" lIns="0" rIns="0" tIns="0" bIns="0">
-            <a:spAutoFit/>
-          </a:bodyPr>
-          <a:lstStyle/>
-          <a:p>
-            <a:pPr algn="l">
-              <a:lnSpc>
-                <a:spcPct val="100000"/>
-              </a:lnSpc>
-              <a:spcAft>
-                <a:spcPts val="600"/>
+              <a:t> claim this generalises to other sectors. Our indicators are sector-specific by construction, which is why the providers build a materiality map per industry.</a:t>
+            </a:r>
+          </a:p>
+          <a:p>
+            <a:pPr algn="l">
+              <a:lnSpc>
+                <a:spcPct val="115000"/>
+              </a:lnSpc>
+              <a:spcAft>
+                <a:spcPts val="500"/>
               </a:spcAft>
             </a:pPr>
             <a:r>
@@ -26038,102 +26532,25 @@
                 </a:solidFill>
                 <a:latin typeface="Calibri"/>
               </a:rPr>
-              <a:t>to run all 17,496 specifications on a laptop</a:t>
-            </a:r>
-          </a:p>
-        </p:txBody>
-      </p:sp>
-      <p:sp>
-        <p:nvSpPr>
-          <p:cNvPr id="17" name="Rectangle 16"/>
-          <p:cNvSpPr/>
-          <p:nvPr/>
-        </p:nvSpPr>
-        <p:spPr>
-          <a:xfrm>
-            <a:off x="777240" y="4937760"/>
-            <a:ext cx="10607040" cy="1051560"/>
-          </a:xfrm>
-          <a:prstGeom prst="rect">
-            <a:avLst/>
-          </a:prstGeom>
-          <a:noFill/>
-          <a:ln w="31750">
-            <a:solidFill>
-              <a:srgbClr val="C04A12"/>
-            </a:solidFill>
-          </a:ln>
-          <a:effectLst/>
-        </p:spPr>
-        <p:style>
-          <a:lnRef idx="1">
-            <a:schemeClr val="accent1"/>
-          </a:lnRef>
-          <a:fillRef idx="3">
-            <a:schemeClr val="accent1"/>
-          </a:fillRef>
-          <a:effectRef idx="2">
-            <a:schemeClr val="accent1"/>
-          </a:effectRef>
-          <a:fontRef idx="minor">
-            <a:schemeClr val="lt1"/>
-          </a:fontRef>
-        </p:style>
-        <p:txBody>
-          <a:bodyPr rtlCol="0" anchor="ctr"/>
-          <a:lstStyle/>
-          <a:p>
-            <a:pPr algn="ctr"/>
-          </a:p>
-        </p:txBody>
-      </p:sp>
-      <p:sp>
-        <p:nvSpPr>
-          <p:cNvPr id="18" name="TextBox 17"/>
-          <p:cNvSpPr txBox="1"/>
-          <p:nvPr/>
-        </p:nvSpPr>
-        <p:spPr>
-          <a:xfrm>
-            <a:off x="1097280" y="5166360"/>
-            <a:ext cx="10058400" cy="640080"/>
-          </a:xfrm>
-          <a:prstGeom prst="rect">
-            <a:avLst/>
-          </a:prstGeom>
-          <a:noFill/>
-        </p:spPr>
-        <p:txBody>
-          <a:bodyPr wrap="square" anchor="t" lIns="0" rIns="0" tIns="0" bIns="0">
-            <a:spAutoFit/>
-          </a:bodyPr>
-          <a:lstStyle/>
-          <a:p>
-            <a:pPr algn="l">
-              <a:lnSpc>
-                <a:spcPct val="100000"/>
-              </a:lnSpc>
-              <a:spcAft>
-                <a:spcPts val="600"/>
-              </a:spcAft>
-            </a:pPr>
-            <a:r>
-              <a:rPr sz="2000" b="1">
+              <a:t>We claim the uncertainty we report </a:t>
+            </a:r>
+            <a:r>
+              <a:rPr sz="1400" b="1">
                 <a:solidFill>
                   <a:srgbClr val="101010"/>
                 </a:solidFill>
                 <a:latin typeface="Calibri"/>
               </a:rPr>
-              <a:t>If the framework survives here, it survives anywhere. </a:t>
-            </a:r>
-            <a:r>
-              <a:rPr sz="2000" b="0">
-                <a:solidFill>
-                  <a:srgbClr val="101010"/>
-                </a:solidFill>
-                <a:latin typeface="Calibri"/>
-              </a:rPr>
-              <a:t>Now watch what happens when I change one convention.</a:t>
+              <a:t>tracks the evidence underneath it</a:t>
+            </a:r>
+            <a:r>
+              <a:rPr sz="1400" b="0">
+                <a:solidFill>
+                  <a:srgbClr val="3D3C38"/>
+                </a:solidFill>
+                <a:latin typeface="Calibri"/>
+              </a:rPr>
+              <a:t>, and sits far inside a random-rank control of 8.5 to 9.0 places. It separates what the data supports from what it does not.</a:t>
             </a:r>
           </a:p>
         </p:txBody>

--- a/CONTESTED_pitch.pptx
+++ b/CONTESTED_pitch.pptx
@@ -822,7 +822,12 @@
           </a:p>
           <a:p>
             <a:r>
-              <a:t>is thinner, and it does: correlation minus 0.83 across the four pillars.</a:t>
+              <a:t>is thinner, and it does. Across all seventy-two company-pillar pairs, Spearman</a:t>
+            </a:r>
+          </a:p>
+          <a:p>
+            <a:r>
+              <a:t>minus 0.35, p equals 0.003.</a:t>
             </a:r>
           </a:p>
           <a:p/>
@@ -839,7 +844,18 @@
           <a:p/>
           <a:p>
             <a:r>
-              <a:t>CAUTION: the 0.55 figure is Lopez 2020, reached through Nasdaq's 2024 ESG</a:t>
+              <a:t>CAUTION 1: do NOT quote a correlation across the four pillars. That is n=4,</a:t>
+            </a:r>
+          </a:p>
+          <a:p>
+            <a:r>
+              <a:t>p=0.17, and the two densest pillars invert. Quote the n=72 figure only.</a:t>
+            </a:r>
+          </a:p>
+          <a:p/>
+          <a:p>
+            <a:r>
+              <a:t>CAUTION 2: the 0.55 figure is Lopez 2020, reached through Nasdaq's 2024 ESG</a:t>
             </a:r>
           </a:p>
           <a:p>
@@ -26352,45 +26368,45 @@
         </p:nvSpPr>
         <p:spPr>
           <a:xfrm>
-            <a:off x="6446520" y="3611880"/>
-            <a:ext cx="4663440" cy="320040"/>
-          </a:xfrm>
-          <a:prstGeom prst="rect">
-            <a:avLst/>
-          </a:prstGeom>
-          <a:noFill/>
-        </p:spPr>
-        <p:txBody>
-          <a:bodyPr wrap="square" anchor="t" lIns="0" rIns="0" tIns="0" bIns="0">
-            <a:spAutoFit/>
-          </a:bodyPr>
-          <a:lstStyle/>
-          <a:p>
-            <a:pPr algn="l">
-              <a:lnSpc>
-                <a:spcPct val="100000"/>
-              </a:lnSpc>
-              <a:spcAft>
-                <a:spcPts val="600"/>
-              </a:spcAft>
-            </a:pPr>
-            <a:r>
-              <a:rPr sz="1200" b="0">
+            <a:off x="6446520" y="3584448"/>
+            <a:ext cx="4663440" cy="365760"/>
+          </a:xfrm>
+          <a:prstGeom prst="rect">
+            <a:avLst/>
+          </a:prstGeom>
+          <a:noFill/>
+        </p:spPr>
+        <p:txBody>
+          <a:bodyPr wrap="square" anchor="t" lIns="0" rIns="0" tIns="0" bIns="0">
+            <a:spAutoFit/>
+          </a:bodyPr>
+          <a:lstStyle/>
+          <a:p>
+            <a:pPr algn="l">
+              <a:lnSpc>
+                <a:spcPct val="100000"/>
+              </a:lnSpc>
+              <a:spcAft>
+                <a:spcPts val="600"/>
+              </a:spcAft>
+            </a:pPr>
+            <a:r>
+              <a:rPr sz="1150" b="0">
                 <a:solidFill>
                   <a:srgbClr val="3D3C38"/>
                 </a:solidFill>
                 <a:latin typeface="Calibri"/>
               </a:rPr>
-              <a:t>Contestation tracks coverage: </a:t>
-            </a:r>
-            <a:r>
-              <a:rPr sz="1200" b="1">
+              <a:t>Across all 72 company-pillar pairs: </a:t>
+            </a:r>
+            <a:r>
+              <a:rPr sz="1150" b="1">
                 <a:solidFill>
                   <a:srgbClr val="101010"/>
                 </a:solidFill>
                 <a:latin typeface="Calibri"/>
               </a:rPr>
-              <a:t>correlation −0.83.</a:t>
+              <a:t>Spearman −0.35, p = 0.003.</a:t>
             </a:r>
           </a:p>
         </p:txBody>
